--- a/apresentacao/Estratégia Proativa de NPS.pptx
+++ b/apresentacao/Estratégia Proativa de NPS.pptx
@@ -3724,2918 +3724,2918 @@
 </file>
 
 <file path=ppt/slides/slide3.xml><?xml version="1.0" encoding="utf-8"?>
-<p:sld xmlns:a="http://schemas.openxmlformats.org/drawingml/2006/main" xmlns:p="http://schemas.openxmlformats.org/presentationml/2006/main" xmlns:r="http://schemas.openxmlformats.org/officeDocument/2006/relationships">
-  <p:cSld>
-    <p:bg>
-      <p:bgPr>
-        <a:solidFill>
-          <a:srgbClr val="FFFFFF"/>
-        </a:solidFill>
-        <a:effectLst/>
-      </p:bgPr>
-    </p:bg>
-    <p:spTree>
-      <p:nvGrpSpPr>
-        <p:cNvPr id="1" name=""/>
-        <p:cNvGrpSpPr/>
-        <p:nvPr/>
-      </p:nvGrpSpPr>
-      <p:grpSpPr/>
-      <p:sp>
-        <p:nvSpPr>
-          <p:cNvPr id="2" name="Rectangle 1"/>
-          <p:cNvSpPr/>
-          <p:nvPr/>
-        </p:nvSpPr>
-        <p:spPr>
-          <a:xfrm>
-            <a:off x="6086475" y="3895725"/>
-            <a:ext cx="19050" cy="1143000"/>
-          </a:xfrm>
-          <a:prstGeom prst="rect">
-            <a:avLst/>
-          </a:prstGeom>
-          <a:solidFill>
-            <a:srgbClr val="E2E8F0"/>
-          </a:solidFill>
-          <a:ln>
-            <a:noFill/>
-          </a:ln>
-          <a:effectLst/>
-        </p:spPr>
-        <p:style>
-          <a:lnRef idx="1">
-            <a:schemeClr val="accent1"/>
-          </a:lnRef>
-          <a:fillRef idx="3">
-            <a:schemeClr val="accent1"/>
-          </a:fillRef>
-          <a:effectRef idx="2">
-            <a:schemeClr val="accent1"/>
-          </a:effectRef>
-          <a:fontRef idx="minor">
-            <a:schemeClr val="lt1"/>
-          </a:fontRef>
-        </p:style>
-        <p:txBody>
-          <a:bodyPr rtlCol="0" anchor="ctr"/>
-          <a:lstStyle/>
-          <a:p>
-            <a:pPr algn="ctr"/>
-          </a:p>
-        </p:txBody>
-      </p:sp>
-      <p:sp>
-        <p:nvSpPr>
-          <p:cNvPr id="3" name="TextBox 2"/>
-          <p:cNvSpPr txBox="1"/>
-          <p:nvPr/>
-        </p:nvSpPr>
-        <p:spPr>
-          <a:xfrm>
-            <a:off x="762000" y="762000"/>
-            <a:ext cx="11430000" cy="190500"/>
-          </a:xfrm>
-          <a:prstGeom prst="rect">
-            <a:avLst/>
-          </a:prstGeom>
-          <a:noFill/>
-        </p:spPr>
-        <p:txBody>
-          <a:bodyPr wrap="none" lIns="0" rIns="0" tIns="0" bIns="0" anchor="t">
-            <a:spAutoFit/>
-          </a:bodyPr>
-          <a:lstStyle/>
-          <a:p>
-            <a:pPr algn="l"/>
-            <a:r>
-              <a:rPr b="1" sz="1200" i="0" u="none">
-                <a:solidFill>
-                  <a:srgbClr val="64748B"/>
-                </a:solidFill>
-                <a:latin typeface="Inter"/>
-              </a:rPr>
-              <a:t>O CUSTO DA INSATISFAÇÃO</a:t>
-            </a:r>
-          </a:p>
-        </p:txBody>
-      </p:sp>
-      <p:sp>
-        <p:nvSpPr>
-          <p:cNvPr id="4" name="TextBox 3"/>
-          <p:cNvSpPr txBox="1"/>
-          <p:nvPr/>
-        </p:nvSpPr>
-        <p:spPr>
-          <a:xfrm>
-            <a:off x="762000" y="1104900"/>
-            <a:ext cx="8101012" cy="1123950"/>
-          </a:xfrm>
-          <a:prstGeom prst="rect">
-            <a:avLst/>
-          </a:prstGeom>
-          <a:noFill/>
-        </p:spPr>
-        <p:txBody>
-          <a:bodyPr wrap="square" lIns="0" rIns="0" tIns="0" bIns="0" anchor="t">
-            <a:spAutoFit/>
-          </a:bodyPr>
-          <a:lstStyle/>
-          <a:p>
-            <a:pPr algn="l"/>
-            <a:r>
-              <a:rPr b="1" sz="3600" i="0" u="none">
-                <a:solidFill>
-                  <a:srgbClr val="0F172A"/>
-                </a:solidFill>
-                <a:latin typeface="Inter"/>
-              </a:rPr>
-              <a:t>O NPS atua como um preditor exato de retenção e receita.</a:t>
-            </a:r>
-          </a:p>
-        </p:txBody>
-      </p:sp>
-      <p:sp>
-        <p:nvSpPr>
-          <p:cNvPr id="5" name="TextBox 4"/>
-          <p:cNvSpPr txBox="1"/>
-          <p:nvPr/>
-        </p:nvSpPr>
-        <p:spPr>
-          <a:xfrm>
-            <a:off x="144065" y="3686175"/>
-            <a:ext cx="6179343" cy="914400"/>
-          </a:xfrm>
-          <a:prstGeom prst="rect">
-            <a:avLst/>
-          </a:prstGeom>
-          <a:noFill/>
-        </p:spPr>
-        <p:txBody>
-          <a:bodyPr wrap="none" lIns="0" rIns="0" tIns="0" bIns="0" anchor="t">
-            <a:spAutoFit/>
-          </a:bodyPr>
-          <a:lstStyle/>
-          <a:p>
-            <a:pPr algn="ctr">
-              <a:lnSpc>
-                <a:spcPts val="7200"/>
-              </a:lnSpc>
-            </a:pPr>
-            <a:r>
-              <a:rPr b="1" sz="7200" i="0" u="none">
-                <a:solidFill>
-                  <a:srgbClr val="0F172A"/>
-                </a:solidFill>
-                <a:latin typeface="Inter"/>
-              </a:rPr>
-              <a:t>100%</a:t>
-            </a:r>
-          </a:p>
-        </p:txBody>
-      </p:sp>
-      <p:sp>
-        <p:nvSpPr>
-          <p:cNvPr id="6" name="TextBox 5"/>
-          <p:cNvSpPr txBox="1"/>
-          <p:nvPr/>
-        </p:nvSpPr>
-        <p:spPr>
-          <a:xfrm>
-            <a:off x="144065" y="4752975"/>
-            <a:ext cx="6179343" cy="228600"/>
-          </a:xfrm>
-          <a:prstGeom prst="rect">
-            <a:avLst/>
-          </a:prstGeom>
-          <a:noFill/>
-        </p:spPr>
-        <p:txBody>
-          <a:bodyPr wrap="none" lIns="0" rIns="0" tIns="0" bIns="0" anchor="t">
-            <a:spAutoFit/>
-          </a:bodyPr>
-          <a:lstStyle/>
-          <a:p>
-            <a:pPr algn="ctr"/>
-            <a:r>
-              <a:rPr b="1" sz="1500" i="0" u="none">
-                <a:solidFill>
-                  <a:srgbClr val="0F172A"/>
-                </a:solidFill>
-                <a:latin typeface="Inter"/>
-              </a:rPr>
-              <a:t>Promotores (Nota 9-10)</a:t>
-            </a:r>
-          </a:p>
-        </p:txBody>
-      </p:sp>
-      <p:sp>
-        <p:nvSpPr>
-          <p:cNvPr id="7" name="TextBox 6"/>
-          <p:cNvSpPr txBox="1"/>
-          <p:nvPr/>
-        </p:nvSpPr>
-        <p:spPr>
-          <a:xfrm>
-            <a:off x="144065" y="5057775"/>
-            <a:ext cx="6179343" cy="190500"/>
-          </a:xfrm>
-          <a:prstGeom prst="rect">
-            <a:avLst/>
-          </a:prstGeom>
-          <a:noFill/>
-        </p:spPr>
-        <p:txBody>
-          <a:bodyPr wrap="none" lIns="0" rIns="0" tIns="0" bIns="0" anchor="t">
-            <a:spAutoFit/>
-          </a:bodyPr>
-          <a:lstStyle/>
-          <a:p>
-            <a:pPr algn="ctr"/>
-            <a:r>
-              <a:rPr b="0" sz="1200" i="0" u="none">
-                <a:solidFill>
-                  <a:srgbClr val="64748B"/>
-                </a:solidFill>
-                <a:latin typeface="Inter"/>
-              </a:rPr>
-              <a:t>Taxa de recompra em 30 dias.</a:t>
-            </a:r>
-          </a:p>
-        </p:txBody>
-      </p:sp>
-      <p:sp>
-        <p:nvSpPr>
-          <p:cNvPr id="8" name="TextBox 7"/>
-          <p:cNvSpPr txBox="1"/>
-          <p:nvPr/>
-        </p:nvSpPr>
-        <p:spPr>
-          <a:xfrm>
-            <a:off x="5868590" y="3686175"/>
-            <a:ext cx="6179343" cy="914400"/>
-          </a:xfrm>
-          <a:prstGeom prst="rect">
-            <a:avLst/>
-          </a:prstGeom>
-          <a:noFill/>
-        </p:spPr>
-        <p:txBody>
-          <a:bodyPr wrap="none" lIns="0" rIns="0" tIns="0" bIns="0" anchor="t">
-            <a:spAutoFit/>
-          </a:bodyPr>
-          <a:lstStyle/>
-          <a:p>
-            <a:pPr algn="ctr">
-              <a:lnSpc>
-                <a:spcPts val="7200"/>
-              </a:lnSpc>
-            </a:pPr>
-            <a:r>
-              <a:rPr b="1" sz="7200" i="0" u="none">
-                <a:solidFill>
-                  <a:srgbClr val="E11D48"/>
-                </a:solidFill>
-                <a:latin typeface="Inter"/>
-              </a:rPr>
-              <a:t>0%</a:t>
-            </a:r>
-          </a:p>
-        </p:txBody>
-      </p:sp>
-      <p:sp>
-        <p:nvSpPr>
-          <p:cNvPr id="9" name="TextBox 8"/>
-          <p:cNvSpPr txBox="1"/>
-          <p:nvPr/>
-        </p:nvSpPr>
-        <p:spPr>
-          <a:xfrm>
-            <a:off x="5868590" y="4752975"/>
-            <a:ext cx="6179343" cy="228600"/>
-          </a:xfrm>
-          <a:prstGeom prst="rect">
-            <a:avLst/>
-          </a:prstGeom>
-          <a:noFill/>
-        </p:spPr>
-        <p:txBody>
-          <a:bodyPr wrap="none" lIns="0" rIns="0" tIns="0" bIns="0" anchor="t">
-            <a:spAutoFit/>
-          </a:bodyPr>
-          <a:lstStyle/>
-          <a:p>
-            <a:pPr algn="ctr"/>
-            <a:r>
-              <a:rPr b="1" sz="1500" i="0" u="none">
-                <a:solidFill>
-                  <a:srgbClr val="0F172A"/>
-                </a:solidFill>
-                <a:latin typeface="Inter"/>
-              </a:rPr>
-              <a:t>Detratores (Nota 0-6)</a:t>
-            </a:r>
-          </a:p>
-        </p:txBody>
-      </p:sp>
-      <p:sp>
-        <p:nvSpPr>
-          <p:cNvPr id="10" name="TextBox 9"/>
-          <p:cNvSpPr txBox="1"/>
-          <p:nvPr/>
-        </p:nvSpPr>
-        <p:spPr>
-          <a:xfrm>
-            <a:off x="5868590" y="5057775"/>
-            <a:ext cx="6179343" cy="190500"/>
-          </a:xfrm>
-          <a:prstGeom prst="rect">
-            <a:avLst/>
-          </a:prstGeom>
-          <a:noFill/>
-        </p:spPr>
-        <p:txBody>
-          <a:bodyPr wrap="none" lIns="0" rIns="0" tIns="0" bIns="0" anchor="t">
-            <a:spAutoFit/>
-          </a:bodyPr>
-          <a:lstStyle/>
-          <a:p>
-            <a:pPr algn="ctr"/>
-            <a:r>
-              <a:rPr b="0" sz="1200" i="0" u="none">
-                <a:solidFill>
-                  <a:srgbClr val="64748B"/>
-                </a:solidFill>
-                <a:latin typeface="Inter"/>
-              </a:rPr>
-              <a:t>Abandono total da marca (Churn).</a:t>
-            </a:r>
-          </a:p>
-        </p:txBody>
-      </p:sp>
-    </p:spTree>
-  </p:cSld>
-  <p:clrMapOvr>
-    <a:masterClrMapping/>
-  </p:clrMapOvr>
-</p:sld>
+<ns0:sld xmlns:ns0="http://schemas.openxmlformats.org/presentationml/2006/main" xmlns:ns1="http://schemas.openxmlformats.org/drawingml/2006/main">
+  <ns0:cSld>
+    <ns0:bg>
+      <ns0:bgPr>
+        <ns1:solidFill>
+          <ns1:srgbClr val="FFFFFF"/>
+        </ns1:solidFill>
+        <ns1:effectLst/>
+      </ns0:bgPr>
+    </ns0:bg>
+    <ns0:spTree>
+      <ns0:nvGrpSpPr>
+        <ns0:cNvPr id="1" name=""/>
+        <ns0:cNvGrpSpPr/>
+        <ns0:nvPr/>
+      </ns0:nvGrpSpPr>
+      <ns0:grpSpPr/>
+      <ns0:sp>
+        <ns0:nvSpPr>
+          <ns0:cNvPr id="2" name="Rectangle 1"/>
+          <ns0:cNvSpPr/>
+          <ns0:nvPr/>
+        </ns0:nvSpPr>
+        <ns0:spPr>
+          <ns1:xfrm>
+            <ns1:off x="6086475" y="3895725"/>
+            <ns1:ext cx="19050" cy="1143000"/>
+          </ns1:xfrm>
+          <ns1:prstGeom prst="rect">
+            <ns1:avLst/>
+          </ns1:prstGeom>
+          <ns1:solidFill>
+            <ns1:srgbClr val="E2E8F0"/>
+          </ns1:solidFill>
+          <ns1:ln>
+            <ns1:noFill/>
+          </ns1:ln>
+          <ns1:effectLst/>
+        </ns0:spPr>
+        <ns0:style>
+          <ns1:lnRef idx="1">
+            <ns1:schemeClr val="accent1"/>
+          </ns1:lnRef>
+          <ns1:fillRef idx="3">
+            <ns1:schemeClr val="accent1"/>
+          </ns1:fillRef>
+          <ns1:effectRef idx="2">
+            <ns1:schemeClr val="accent1"/>
+          </ns1:effectRef>
+          <ns1:fontRef idx="minor">
+            <ns1:schemeClr val="lt1"/>
+          </ns1:fontRef>
+        </ns0:style>
+        <ns0:txBody>
+          <ns1:bodyPr rtlCol="0" anchor="ctr"/>
+          <ns1:lstStyle/>
+          <ns1:p>
+            <ns1:pPr algn="ctr"/>
+          </ns1:p>
+        </ns0:txBody>
+      </ns0:sp>
+      <ns0:sp>
+        <ns0:nvSpPr>
+          <ns0:cNvPr id="3" name="TextBox 2"/>
+          <ns0:cNvSpPr txBox="1"/>
+          <ns0:nvPr/>
+        </ns0:nvSpPr>
+        <ns0:spPr>
+          <ns1:xfrm>
+            <ns1:off x="762000" y="762000"/>
+            <ns1:ext cx="11430000" cy="190500"/>
+          </ns1:xfrm>
+          <ns1:prstGeom prst="rect">
+            <ns1:avLst/>
+          </ns1:prstGeom>
+          <ns1:noFill/>
+        </ns0:spPr>
+        <ns0:txBody>
+          <ns1:bodyPr wrap="none" lIns="0" rIns="0" tIns="0" bIns="0" anchor="t">
+            <ns1:spAutoFit/>
+          </ns1:bodyPr>
+          <ns1:lstStyle/>
+          <ns1:p>
+            <ns1:pPr algn="l"/>
+            <ns1:r>
+              <ns1:rPr b="1" sz="1200" i="0" u="none">
+                <ns1:solidFill>
+                  <ns1:srgbClr val="64748B"/>
+                </ns1:solidFill>
+                <ns1:latin typeface="Inter"/>
+              </ns1:rPr>
+              <ns1:t>O CUSTO DA INSATISFAÇÃO</ns1:t>
+            </ns1:r>
+          </ns1:p>
+        </ns0:txBody>
+      </ns0:sp>
+      <ns0:sp>
+        <ns0:nvSpPr>
+          <ns0:cNvPr id="4" name="TextBox 3"/>
+          <ns0:cNvSpPr txBox="1"/>
+          <ns0:nvPr/>
+        </ns0:nvSpPr>
+        <ns0:spPr>
+          <ns1:xfrm>
+            <ns1:off x="762000" y="1104900"/>
+            <ns1:ext cx="8101012" cy="1123950"/>
+          </ns1:xfrm>
+          <ns1:prstGeom prst="rect">
+            <ns1:avLst/>
+          </ns1:prstGeom>
+          <ns1:noFill/>
+        </ns0:spPr>
+        <ns0:txBody>
+          <ns1:bodyPr wrap="square" lIns="0" rIns="0" tIns="0" bIns="0" anchor="t">
+            <ns1:spAutoFit/>
+          </ns1:bodyPr>
+          <ns1:lstStyle/>
+          <ns1:p>
+            <ns1:pPr algn="l"/>
+            <ns1:r>
+              <ns1:rPr b="1" sz="3600" i="0" u="none">
+                <ns1:solidFill>
+                  <ns1:srgbClr val="0F172A"/>
+                </ns1:solidFill>
+                <ns1:latin typeface="Inter"/>
+              </ns1:rPr>
+              <ns1:t>Nesta base, recompra coincide exatamente com um corte da nota.</ns1:t>
+            </ns1:r>
+          </ns1:p>
+        </ns0:txBody>
+      </ns0:sp>
+      <ns0:sp>
+        <ns0:nvSpPr>
+          <ns0:cNvPr id="5" name="TextBox 4"/>
+          <ns0:cNvSpPr txBox="1"/>
+          <ns0:nvPr/>
+        </ns0:nvSpPr>
+        <ns0:spPr>
+          <ns1:xfrm>
+            <ns1:off x="144065" y="3686175"/>
+            <ns1:ext cx="6179343" cy="914400"/>
+          </ns1:xfrm>
+          <ns1:prstGeom prst="rect">
+            <ns1:avLst/>
+          </ns1:prstGeom>
+          <ns1:noFill/>
+        </ns0:spPr>
+        <ns0:txBody>
+          <ns1:bodyPr wrap="none" lIns="0" rIns="0" tIns="0" bIns="0" anchor="t">
+            <ns1:spAutoFit/>
+          </ns1:bodyPr>
+          <ns1:lstStyle/>
+          <ns1:p>
+            <ns1:pPr algn="ctr">
+              <ns1:lnSpc>
+                <ns1:spcPts val="7200"/>
+              </ns1:lnSpc>
+            </ns1:pPr>
+            <ns1:r>
+              <ns1:rPr b="1" sz="7200" i="0" u="none">
+                <ns1:solidFill>
+                  <ns1:srgbClr val="0F172A"/>
+                </ns1:solidFill>
+                <ns1:latin typeface="Inter"/>
+              </ns1:rPr>
+              <ns1:t>100%</ns1:t>
+            </ns1:r>
+          </ns1:p>
+        </ns0:txBody>
+      </ns0:sp>
+      <ns0:sp>
+        <ns0:nvSpPr>
+          <ns0:cNvPr id="6" name="TextBox 5"/>
+          <ns0:cNvSpPr txBox="1"/>
+          <ns0:nvPr/>
+        </ns0:nvSpPr>
+        <ns0:spPr>
+          <ns1:xfrm>
+            <ns1:off x="144065" y="4752975"/>
+            <ns1:ext cx="6179343" cy="228600"/>
+          </ns1:xfrm>
+          <ns1:prstGeom prst="rect">
+            <ns1:avLst/>
+          </ns1:prstGeom>
+          <ns1:noFill/>
+        </ns0:spPr>
+        <ns0:txBody>
+          <ns1:bodyPr wrap="none" lIns="0" rIns="0" tIns="0" bIns="0" anchor="t">
+            <ns1:spAutoFit/>
+          </ns1:bodyPr>
+          <ns1:lstStyle/>
+          <ns1:p>
+            <ns1:pPr algn="ctr"/>
+            <ns1:r>
+              <ns1:rPr b="1" sz="1500" i="0" u="none">
+                <ns1:solidFill>
+                  <ns1:srgbClr val="0F172A"/>
+                </ns1:solidFill>
+                <ns1:latin typeface="Inter"/>
+              </ns1:rPr>
+              <ns1:t>Notas acima de 8</ns1:t>
+            </ns1:r>
+          </ns1:p>
+        </ns0:txBody>
+      </ns0:sp>
+      <ns0:sp>
+        <ns0:nvSpPr>
+          <ns0:cNvPr id="7" name="TextBox 6"/>
+          <ns0:cNvSpPr txBox="1"/>
+          <ns0:nvPr/>
+        </ns0:nvSpPr>
+        <ns0:spPr>
+          <ns1:xfrm>
+            <ns1:off x="144065" y="5057775"/>
+            <ns1:ext cx="6179343" cy="190500"/>
+          </ns1:xfrm>
+          <ns1:prstGeom prst="rect">
+            <ns1:avLst/>
+          </ns1:prstGeom>
+          <ns1:noFill/>
+        </ns0:spPr>
+        <ns0:txBody>
+          <ns1:bodyPr wrap="none" lIns="0" rIns="0" tIns="0" bIns="0" anchor="t">
+            <ns1:spAutoFit/>
+          </ns1:bodyPr>
+          <ns1:lstStyle/>
+          <ns1:p>
+            <ns1:pPr algn="ctr"/>
+            <ns1:r>
+              <ns1:rPr b="0" sz="1200" i="0" u="none">
+                <ns1:solidFill>
+                  <ns1:srgbClr val="64748B"/>
+                </ns1:solidFill>
+                <ns1:latin typeface="Inter"/>
+              </ns1:rPr>
+              <ns1:t>Recompra observada; regra coincide com nota.</ns1:t>
+            </ns1:r>
+          </ns1:p>
+        </ns0:txBody>
+      </ns0:sp>
+      <ns0:sp>
+        <ns0:nvSpPr>
+          <ns0:cNvPr id="8" name="TextBox 7"/>
+          <ns0:cNvSpPr txBox="1"/>
+          <ns0:nvPr/>
+        </ns0:nvSpPr>
+        <ns0:spPr>
+          <ns1:xfrm>
+            <ns1:off x="5868590" y="3686175"/>
+            <ns1:ext cx="6179343" cy="914400"/>
+          </ns1:xfrm>
+          <ns1:prstGeom prst="rect">
+            <ns1:avLst/>
+          </ns1:prstGeom>
+          <ns1:noFill/>
+        </ns0:spPr>
+        <ns0:txBody>
+          <ns1:bodyPr wrap="none" lIns="0" rIns="0" tIns="0" bIns="0" anchor="t">
+            <ns1:spAutoFit/>
+          </ns1:bodyPr>
+          <ns1:lstStyle/>
+          <ns1:p>
+            <ns1:pPr algn="ctr">
+              <ns1:lnSpc>
+                <ns1:spcPts val="7200"/>
+              </ns1:lnSpc>
+            </ns1:pPr>
+            <ns1:r>
+              <ns1:rPr b="1" sz="7200" i="0" u="none">
+                <ns1:solidFill>
+                  <ns1:srgbClr val="E11D48"/>
+                </ns1:solidFill>
+                <ns1:latin typeface="Inter"/>
+              </ns1:rPr>
+              <ns1:t>0%</ns1:t>
+            </ns1:r>
+          </ns1:p>
+        </ns0:txBody>
+      </ns0:sp>
+      <ns0:sp>
+        <ns0:nvSpPr>
+          <ns0:cNvPr id="9" name="TextBox 8"/>
+          <ns0:cNvSpPr txBox="1"/>
+          <ns0:nvPr/>
+        </ns0:nvSpPr>
+        <ns0:spPr>
+          <ns1:xfrm>
+            <ns1:off x="5868590" y="4752975"/>
+            <ns1:ext cx="6179343" cy="228600"/>
+          </ns1:xfrm>
+          <ns1:prstGeom prst="rect">
+            <ns1:avLst/>
+          </ns1:prstGeom>
+          <ns1:noFill/>
+        </ns0:spPr>
+        <ns0:txBody>
+          <ns1:bodyPr wrap="none" lIns="0" rIns="0" tIns="0" bIns="0" anchor="t">
+            <ns1:spAutoFit/>
+          </ns1:bodyPr>
+          <ns1:lstStyle/>
+          <ns1:p>
+            <ns1:pPr algn="ctr"/>
+            <ns1:r>
+              <ns1:rPr b="1" sz="1500" i="0" u="none">
+                <ns1:solidFill>
+                  <ns1:srgbClr val="0F172A"/>
+                </ns1:solidFill>
+                <ns1:latin typeface="Inter"/>
+              </ns1:rPr>
+              <ns1:t>Notas até 6</ns1:t>
+            </ns1:r>
+          </ns1:p>
+        </ns0:txBody>
+      </ns0:sp>
+      <ns0:sp>
+        <ns0:nvSpPr>
+          <ns0:cNvPr id="10" name="TextBox 9"/>
+          <ns0:cNvSpPr txBox="1"/>
+          <ns0:nvPr/>
+        </ns0:nvSpPr>
+        <ns0:spPr>
+          <ns1:xfrm>
+            <ns1:off x="5868590" y="5057775"/>
+            <ns1:ext cx="6179343" cy="190500"/>
+          </ns1:xfrm>
+          <ns1:prstGeom prst="rect">
+            <ns1:avLst/>
+          </ns1:prstGeom>
+          <ns1:noFill/>
+        </ns0:spPr>
+        <ns0:txBody>
+          <ns1:bodyPr wrap="none" lIns="0" rIns="0" tIns="0" bIns="0" anchor="t">
+            <ns1:spAutoFit/>
+          </ns1:bodyPr>
+          <ns1:lstStyle/>
+          <ns1:p>
+            <ns1:pPr algn="ctr"/>
+            <ns1:r>
+              <ns1:rPr b="0" sz="1200" i="0" u="none">
+                <ns1:solidFill>
+                  <ns1:srgbClr val="64748B"/>
+                </ns1:solidFill>
+                <ns1:latin typeface="Inter"/>
+              </ns1:rPr>
+              <ns1:t>Nenhuma recompra observada; não prova churn.</ns1:t>
+            </ns1:r>
+          </ns1:p>
+        </ns0:txBody>
+      </ns0:sp>
+    </ns0:spTree>
+  </ns0:cSld>
+  <ns0:clrMapOvr>
+    <ns1:masterClrMapping/>
+  </ns0:clrMapOvr>
+</ns0:sld>
 </file>
 
 <file path=ppt/slides/slide4.xml><?xml version="1.0" encoding="utf-8"?>
-<p:sld xmlns:a="http://schemas.openxmlformats.org/drawingml/2006/main" xmlns:p="http://schemas.openxmlformats.org/presentationml/2006/main" xmlns:r="http://schemas.openxmlformats.org/officeDocument/2006/relationships">
-  <p:cSld>
-    <p:bg>
-      <p:bgPr>
-        <a:solidFill>
-          <a:srgbClr val="F8FAFC"/>
-        </a:solidFill>
-        <a:effectLst/>
-      </p:bgPr>
-    </p:bg>
-    <p:spTree>
-      <p:nvGrpSpPr>
-        <p:cNvPr id="1" name=""/>
-        <p:cNvGrpSpPr/>
-        <p:nvPr/>
-      </p:nvGrpSpPr>
-      <p:grpSpPr/>
-      <p:sp>
-        <p:nvSpPr>
-          <p:cNvPr id="2" name="Rounded Rectangle 1"/>
-          <p:cNvSpPr/>
-          <p:nvPr/>
-        </p:nvSpPr>
-        <p:spPr>
-          <a:xfrm>
-            <a:off x="762000" y="2452687"/>
-            <a:ext cx="3352800" cy="2876550"/>
-          </a:xfrm>
-          <a:prstGeom prst="roundRect">
-            <a:avLst>
-              <a:gd name="adj" fmla="val 5298"/>
-            </a:avLst>
-          </a:prstGeom>
-          <a:solidFill>
-            <a:srgbClr val="FFFFFF"/>
-          </a:solidFill>
-          <a:ln>
-            <a:noFill/>
-          </a:ln>
-          <a:effectLst/>
-        </p:spPr>
-        <p:style>
-          <a:lnRef idx="1">
-            <a:schemeClr val="accent1"/>
-          </a:lnRef>
-          <a:fillRef idx="3">
-            <a:schemeClr val="accent1"/>
-          </a:fillRef>
-          <a:effectRef idx="2">
-            <a:schemeClr val="accent1"/>
-          </a:effectRef>
-          <a:fontRef idx="minor">
-            <a:schemeClr val="lt1"/>
-          </a:fontRef>
-        </p:style>
-        <p:txBody>
-          <a:bodyPr rtlCol="0" anchor="ctr"/>
-          <a:lstStyle/>
-          <a:p>
-            <a:pPr algn="ctr"/>
-          </a:p>
-        </p:txBody>
-      </p:sp>
-      <p:sp>
-        <p:nvSpPr>
-          <p:cNvPr id="3" name="Rounded Rectangle 2"/>
-          <p:cNvSpPr/>
-          <p:nvPr/>
-        </p:nvSpPr>
-        <p:spPr>
-          <a:xfrm>
-            <a:off x="4419600" y="2390775"/>
-            <a:ext cx="3352800" cy="3000375"/>
-          </a:xfrm>
-          <a:prstGeom prst="roundRect">
-            <a:avLst>
-              <a:gd name="adj" fmla="val 5079"/>
-            </a:avLst>
-          </a:prstGeom>
-          <a:solidFill>
-            <a:srgbClr val="FFFFFF"/>
-          </a:solidFill>
-          <a:ln>
-            <a:noFill/>
-          </a:ln>
-          <a:effectLst/>
-        </p:spPr>
-        <p:style>
-          <a:lnRef idx="1">
-            <a:schemeClr val="accent1"/>
-          </a:lnRef>
-          <a:fillRef idx="3">
-            <a:schemeClr val="accent1"/>
-          </a:fillRef>
-          <a:effectRef idx="2">
-            <a:schemeClr val="accent1"/>
-          </a:effectRef>
-          <a:fontRef idx="minor">
-            <a:schemeClr val="lt1"/>
-          </a:fontRef>
-        </p:style>
-        <p:txBody>
-          <a:bodyPr rtlCol="0" anchor="ctr"/>
-          <a:lstStyle/>
-          <a:p>
-            <a:pPr algn="ctr"/>
-          </a:p>
-        </p:txBody>
-      </p:sp>
-      <p:sp>
-        <p:nvSpPr>
-          <p:cNvPr id="4" name="Rounded Rectangle 3"/>
-          <p:cNvSpPr/>
-          <p:nvPr/>
-        </p:nvSpPr>
-        <p:spPr>
-          <a:xfrm>
-            <a:off x="8077200" y="2152650"/>
-            <a:ext cx="3352800" cy="3476625"/>
-          </a:xfrm>
-          <a:prstGeom prst="roundRect">
-            <a:avLst>
-              <a:gd name="adj" fmla="val 4545"/>
-            </a:avLst>
-          </a:prstGeom>
-          <a:solidFill>
-            <a:srgbClr val="FFFFFF"/>
-          </a:solidFill>
-          <a:ln>
-            <a:noFill/>
-          </a:ln>
-          <a:effectLst/>
-        </p:spPr>
-        <p:style>
-          <a:lnRef idx="1">
-            <a:schemeClr val="accent1"/>
-          </a:lnRef>
-          <a:fillRef idx="3">
-            <a:schemeClr val="accent1"/>
-          </a:fillRef>
-          <a:effectRef idx="2">
-            <a:schemeClr val="accent1"/>
-          </a:effectRef>
-          <a:fontRef idx="minor">
-            <a:schemeClr val="lt1"/>
-          </a:fontRef>
-        </p:style>
-        <p:txBody>
-          <a:bodyPr rtlCol="0" anchor="ctr"/>
-          <a:lstStyle/>
-          <a:p>
-            <a:pPr algn="ctr"/>
-          </a:p>
-        </p:txBody>
-      </p:sp>
-      <p:pic>
-        <p:nvPicPr>
-          <p:cNvPr id="5" name="Picture 4" descr="image.png"/>
-          <p:cNvPicPr>
-            <a:picLocks noChangeAspect="1"/>
-          </p:cNvPicPr>
-          <p:nvPr/>
-        </p:nvPicPr>
-        <p:blipFill>
-          <a:blip r:embed="rId2"/>
-          <a:stretch>
-            <a:fillRect/>
-          </a:stretch>
-        </p:blipFill>
-        <p:spPr>
-          <a:xfrm>
-            <a:off x="1143000" y="2833687"/>
-            <a:ext cx="476250" cy="381000"/>
-          </a:xfrm>
-          <a:prstGeom prst="rect">
-            <a:avLst/>
-          </a:prstGeom>
-        </p:spPr>
-      </p:pic>
-      <p:pic>
-        <p:nvPicPr>
-          <p:cNvPr id="6" name="Picture 5" descr="image.png"/>
-          <p:cNvPicPr>
-            <a:picLocks noChangeAspect="1"/>
-          </p:cNvPicPr>
-          <p:nvPr/>
-        </p:nvPicPr>
-        <p:blipFill>
-          <a:blip r:embed="rId3"/>
-          <a:stretch>
-            <a:fillRect/>
-          </a:stretch>
-        </p:blipFill>
-        <p:spPr>
-          <a:xfrm>
-            <a:off x="4800600" y="2771775"/>
-            <a:ext cx="381000" cy="381000"/>
-          </a:xfrm>
-          <a:prstGeom prst="rect">
-            <a:avLst/>
-          </a:prstGeom>
-        </p:spPr>
-      </p:pic>
-      <p:pic>
-        <p:nvPicPr>
-          <p:cNvPr id="7" name="Picture 6" descr="image.png"/>
-          <p:cNvPicPr>
-            <a:picLocks noChangeAspect="1"/>
-          </p:cNvPicPr>
-          <p:nvPr/>
-        </p:nvPicPr>
-        <p:blipFill>
-          <a:blip r:embed="rId4"/>
-          <a:stretch>
-            <a:fillRect/>
-          </a:stretch>
-        </p:blipFill>
-        <p:spPr>
-          <a:xfrm>
-            <a:off x="8458200" y="2533650"/>
-            <a:ext cx="476250" cy="381000"/>
-          </a:xfrm>
-          <a:prstGeom prst="rect">
-            <a:avLst/>
-          </a:prstGeom>
-        </p:spPr>
-      </p:pic>
-      <p:sp>
-        <p:nvSpPr>
-          <p:cNvPr id="8" name="TextBox 7"/>
-          <p:cNvSpPr txBox="1"/>
-          <p:nvPr/>
-        </p:nvSpPr>
-        <p:spPr>
-          <a:xfrm>
-            <a:off x="762000" y="762000"/>
-            <a:ext cx="11430000" cy="466725"/>
-          </a:xfrm>
-          <a:prstGeom prst="rect">
-            <a:avLst/>
-          </a:prstGeom>
-          <a:noFill/>
-        </p:spPr>
-        <p:txBody>
-          <a:bodyPr wrap="none" lIns="0" rIns="0" tIns="0" bIns="0" anchor="t">
-            <a:spAutoFit/>
-          </a:bodyPr>
-          <a:lstStyle/>
-          <a:p>
-            <a:pPr algn="l"/>
-            <a:r>
-              <a:rPr b="1" sz="3000" i="0" u="none">
-                <a:solidFill>
-                  <a:srgbClr val="0F172A"/>
-                </a:solidFill>
-                <a:latin typeface="Inter"/>
-              </a:rPr>
-              <a:t>Os Inimigos da Satisfação</a:t>
-            </a:r>
-          </a:p>
-        </p:txBody>
-      </p:sp>
-      <p:sp>
-        <p:nvSpPr>
-          <p:cNvPr id="9" name="TextBox 8"/>
-          <p:cNvSpPr txBox="1"/>
-          <p:nvPr/>
-        </p:nvSpPr>
-        <p:spPr>
-          <a:xfrm>
-            <a:off x="1143000" y="3443287"/>
-            <a:ext cx="3400425" cy="323850"/>
-          </a:xfrm>
-          <a:prstGeom prst="rect">
-            <a:avLst/>
-          </a:prstGeom>
-          <a:noFill/>
-        </p:spPr>
-        <p:txBody>
-          <a:bodyPr wrap="none" lIns="0" rIns="0" tIns="0" bIns="0" anchor="t">
-            <a:spAutoFit/>
-          </a:bodyPr>
-          <a:lstStyle/>
-          <a:p>
-            <a:pPr algn="l"/>
-            <a:r>
-              <a:rPr b="1" sz="2100" i="0" u="none">
-                <a:solidFill>
-                  <a:srgbClr val="0F172A"/>
-                </a:solidFill>
-                <a:latin typeface="Inter"/>
-              </a:rPr>
-              <a:t>Atraso Logístico</a:t>
-            </a:r>
-          </a:p>
-        </p:txBody>
-      </p:sp>
-      <p:sp>
-        <p:nvSpPr>
-          <p:cNvPr id="10" name="TextBox 9"/>
-          <p:cNvSpPr txBox="1"/>
-          <p:nvPr/>
-        </p:nvSpPr>
-        <p:spPr>
-          <a:xfrm>
-            <a:off x="1143000" y="3919537"/>
-            <a:ext cx="3238500" cy="276225"/>
-          </a:xfrm>
-          <a:prstGeom prst="rect">
-            <a:avLst/>
-          </a:prstGeom>
-          <a:noFill/>
-        </p:spPr>
-        <p:txBody>
-          <a:bodyPr wrap="none" lIns="0" rIns="0" tIns="0" bIns="0" anchor="t">
-            <a:spAutoFit/>
-          </a:bodyPr>
-          <a:lstStyle/>
-          <a:p>
-            <a:pPr algn="l"/>
-            <a:r>
-              <a:rPr b="1" sz="1800" i="0" u="none">
-                <a:solidFill>
-                  <a:srgbClr val="E11D48"/>
-                </a:solidFill>
-                <a:latin typeface="Inter"/>
-              </a:rPr>
-              <a:t>-0.60 (Correlação)</a:t>
-            </a:r>
-          </a:p>
-        </p:txBody>
-      </p:sp>
-      <p:sp>
-        <p:nvSpPr>
-          <p:cNvPr id="11" name="TextBox 10"/>
-          <p:cNvSpPr txBox="1"/>
-          <p:nvPr/>
-        </p:nvSpPr>
-        <p:spPr>
-          <a:xfrm>
-            <a:off x="1143000" y="4348162"/>
-            <a:ext cx="2686050" cy="600075"/>
-          </a:xfrm>
-          <a:prstGeom prst="rect">
-            <a:avLst/>
-          </a:prstGeom>
-          <a:noFill/>
-        </p:spPr>
-        <p:txBody>
-          <a:bodyPr wrap="square" lIns="0" rIns="0" tIns="0" bIns="0" anchor="t">
-            <a:spAutoFit/>
-          </a:bodyPr>
-          <a:lstStyle/>
-          <a:p>
-            <a:pPr algn="l"/>
-            <a:r>
-              <a:rPr b="0" sz="1350" i="0" u="none">
-                <a:solidFill>
-                  <a:srgbClr val="475569"/>
-                </a:solidFill>
-                <a:latin typeface="Inter"/>
-              </a:rPr>
-              <a:t>Maior ofensor absoluto. Destrói instantaneamente a nota do cliente.</a:t>
-            </a:r>
-          </a:p>
-        </p:txBody>
-      </p:sp>
-      <p:sp>
-        <p:nvSpPr>
-          <p:cNvPr id="12" name="TextBox 11"/>
-          <p:cNvSpPr txBox="1"/>
-          <p:nvPr/>
-        </p:nvSpPr>
-        <p:spPr>
-          <a:xfrm>
-            <a:off x="4800600" y="3381375"/>
-            <a:ext cx="2820352" cy="647700"/>
-          </a:xfrm>
-          <a:prstGeom prst="rect">
-            <a:avLst/>
-          </a:prstGeom>
-          <a:noFill/>
-        </p:spPr>
-        <p:txBody>
-          <a:bodyPr wrap="square" lIns="0" rIns="0" tIns="0" bIns="0" anchor="t">
-            <a:spAutoFit/>
-          </a:bodyPr>
-          <a:lstStyle/>
-          <a:p>
-            <a:pPr algn="l"/>
-            <a:r>
-              <a:rPr b="1" sz="2100" i="0" u="none">
-                <a:solidFill>
-                  <a:srgbClr val="0F172A"/>
-                </a:solidFill>
-                <a:latin typeface="Inter"/>
-              </a:rPr>
-              <a:t>Volume de Reclamações</a:t>
-            </a:r>
-          </a:p>
-        </p:txBody>
-      </p:sp>
-      <p:sp>
-        <p:nvSpPr>
-          <p:cNvPr id="13" name="TextBox 12"/>
-          <p:cNvSpPr txBox="1"/>
-          <p:nvPr/>
-        </p:nvSpPr>
-        <p:spPr>
-          <a:xfrm>
-            <a:off x="4800600" y="4181475"/>
-            <a:ext cx="3238500" cy="276225"/>
-          </a:xfrm>
-          <a:prstGeom prst="rect">
-            <a:avLst/>
-          </a:prstGeom>
-          <a:noFill/>
-        </p:spPr>
-        <p:txBody>
-          <a:bodyPr wrap="none" lIns="0" rIns="0" tIns="0" bIns="0" anchor="t">
-            <a:spAutoFit/>
-          </a:bodyPr>
-          <a:lstStyle/>
-          <a:p>
-            <a:pPr algn="l"/>
-            <a:r>
-              <a:rPr b="1" sz="1800" i="0" u="none">
-                <a:solidFill>
-                  <a:srgbClr val="E11D48"/>
-                </a:solidFill>
-                <a:latin typeface="Inter"/>
-              </a:rPr>
-              <a:t>-0.50 (Correlação)</a:t>
-            </a:r>
-          </a:p>
-        </p:txBody>
-      </p:sp>
-      <p:sp>
-        <p:nvSpPr>
-          <p:cNvPr id="14" name="TextBox 13"/>
-          <p:cNvSpPr txBox="1"/>
-          <p:nvPr/>
-        </p:nvSpPr>
-        <p:spPr>
-          <a:xfrm>
-            <a:off x="4800600" y="4610100"/>
-            <a:ext cx="2686050" cy="400050"/>
-          </a:xfrm>
-          <a:prstGeom prst="rect">
-            <a:avLst/>
-          </a:prstGeom>
-          <a:noFill/>
-        </p:spPr>
-        <p:txBody>
-          <a:bodyPr wrap="square" lIns="0" rIns="0" tIns="0" bIns="0" anchor="t">
-            <a:spAutoFit/>
-          </a:bodyPr>
-          <a:lstStyle/>
-          <a:p>
-            <a:pPr algn="l"/>
-            <a:r>
-              <a:rPr b="0" sz="1350" i="0" u="none">
-                <a:solidFill>
-                  <a:srgbClr val="475569"/>
-                </a:solidFill>
-                <a:latin typeface="Inter"/>
-              </a:rPr>
-              <a:t>A necessidade de acionar o SAC multiplica a insatisfação.</a:t>
-            </a:r>
-          </a:p>
-        </p:txBody>
-      </p:sp>
-      <p:sp>
-        <p:nvSpPr>
-          <p:cNvPr id="15" name="TextBox 14"/>
-          <p:cNvSpPr txBox="1"/>
-          <p:nvPr/>
-        </p:nvSpPr>
-        <p:spPr>
-          <a:xfrm>
-            <a:off x="8458200" y="3143250"/>
-            <a:ext cx="2820352" cy="647700"/>
-          </a:xfrm>
-          <a:prstGeom prst="rect">
-            <a:avLst/>
-          </a:prstGeom>
-          <a:noFill/>
-        </p:spPr>
-        <p:txBody>
-          <a:bodyPr wrap="square" lIns="0" rIns="0" tIns="0" bIns="0" anchor="t">
-            <a:spAutoFit/>
-          </a:bodyPr>
-          <a:lstStyle/>
-          <a:p>
-            <a:pPr algn="l"/>
-            <a:r>
-              <a:rPr b="1" sz="2100" i="0" u="none">
-                <a:solidFill>
-                  <a:srgbClr val="0F172A"/>
-                </a:solidFill>
-                <a:latin typeface="Inter"/>
-              </a:rPr>
-              <a:t>Tentativas de Entrega</a:t>
-            </a:r>
-          </a:p>
-        </p:txBody>
-      </p:sp>
-      <p:sp>
-        <p:nvSpPr>
-          <p:cNvPr id="16" name="TextBox 15"/>
-          <p:cNvSpPr txBox="1"/>
-          <p:nvPr/>
-        </p:nvSpPr>
-        <p:spPr>
-          <a:xfrm>
-            <a:off x="8458200" y="3943350"/>
-            <a:ext cx="2686050" cy="552450"/>
-          </a:xfrm>
-          <a:prstGeom prst="rect">
-            <a:avLst/>
-          </a:prstGeom>
-          <a:noFill/>
-        </p:spPr>
-        <p:txBody>
-          <a:bodyPr wrap="square" lIns="0" rIns="0" tIns="0" bIns="0" anchor="t">
-            <a:spAutoFit/>
-          </a:bodyPr>
-          <a:lstStyle/>
-          <a:p>
-            <a:pPr algn="l"/>
-            <a:r>
-              <a:rPr b="1" sz="1800" i="0" u="none">
-                <a:solidFill>
-                  <a:srgbClr val="0F172A"/>
-                </a:solidFill>
-                <a:latin typeface="Inter"/>
-              </a:rPr>
-              <a:t>+0.03 (Correlação nula)</a:t>
-            </a:r>
-          </a:p>
-        </p:txBody>
-      </p:sp>
-      <p:sp>
-        <p:nvSpPr>
-          <p:cNvPr id="17" name="TextBox 16"/>
-          <p:cNvSpPr txBox="1"/>
-          <p:nvPr/>
-        </p:nvSpPr>
-        <p:spPr>
-          <a:xfrm>
-            <a:off x="8458200" y="4648200"/>
-            <a:ext cx="2686050" cy="600075"/>
-          </a:xfrm>
-          <a:prstGeom prst="rect">
-            <a:avLst/>
-          </a:prstGeom>
-          <a:noFill/>
-        </p:spPr>
-        <p:txBody>
-          <a:bodyPr wrap="square" lIns="0" rIns="0" tIns="0" bIns="0" anchor="t">
-            <a:spAutoFit/>
-          </a:bodyPr>
-          <a:lstStyle/>
-          <a:p>
-            <a:pPr algn="l"/>
-            <a:r>
-              <a:rPr b="0" sz="1350" i="0" u="none">
-                <a:solidFill>
-                  <a:srgbClr val="475569"/>
-                </a:solidFill>
-                <a:latin typeface="Inter"/>
-              </a:rPr>
-              <a:t>Múltiplas visitas não afetam o NPS, desde que não haja atraso.</a:t>
-            </a:r>
-          </a:p>
-        </p:txBody>
-      </p:sp>
-    </p:spTree>
-  </p:cSld>
-  <p:clrMapOvr>
-    <a:masterClrMapping/>
-  </p:clrMapOvr>
-</p:sld>
+<ns0:sld xmlns:ns0="http://schemas.openxmlformats.org/presentationml/2006/main" xmlns:ns1="http://schemas.openxmlformats.org/drawingml/2006/main" xmlns:ns2="http://schemas.openxmlformats.org/officeDocument/2006/relationships">
+  <ns0:cSld>
+    <ns0:bg>
+      <ns0:bgPr>
+        <ns1:solidFill>
+          <ns1:srgbClr val="F8FAFC"/>
+        </ns1:solidFill>
+        <ns1:effectLst/>
+      </ns0:bgPr>
+    </ns0:bg>
+    <ns0:spTree>
+      <ns0:nvGrpSpPr>
+        <ns0:cNvPr id="1" name=""/>
+        <ns0:cNvGrpSpPr/>
+        <ns0:nvPr/>
+      </ns0:nvGrpSpPr>
+      <ns0:grpSpPr/>
+      <ns0:sp>
+        <ns0:nvSpPr>
+          <ns0:cNvPr id="2" name="Rounded Rectangle 1"/>
+          <ns0:cNvSpPr/>
+          <ns0:nvPr/>
+        </ns0:nvSpPr>
+        <ns0:spPr>
+          <ns1:xfrm>
+            <ns1:off x="762000" y="2452687"/>
+            <ns1:ext cx="3352800" cy="2876550"/>
+          </ns1:xfrm>
+          <ns1:prstGeom prst="roundRect">
+            <ns1:avLst>
+              <ns1:gd name="adj" fmla="val 5298"/>
+            </ns1:avLst>
+          </ns1:prstGeom>
+          <ns1:solidFill>
+            <ns1:srgbClr val="FFFFFF"/>
+          </ns1:solidFill>
+          <ns1:ln>
+            <ns1:noFill/>
+          </ns1:ln>
+          <ns1:effectLst/>
+        </ns0:spPr>
+        <ns0:style>
+          <ns1:lnRef idx="1">
+            <ns1:schemeClr val="accent1"/>
+          </ns1:lnRef>
+          <ns1:fillRef idx="3">
+            <ns1:schemeClr val="accent1"/>
+          </ns1:fillRef>
+          <ns1:effectRef idx="2">
+            <ns1:schemeClr val="accent1"/>
+          </ns1:effectRef>
+          <ns1:fontRef idx="minor">
+            <ns1:schemeClr val="lt1"/>
+          </ns1:fontRef>
+        </ns0:style>
+        <ns0:txBody>
+          <ns1:bodyPr rtlCol="0" anchor="ctr"/>
+          <ns1:lstStyle/>
+          <ns1:p>
+            <ns1:pPr algn="ctr"/>
+          </ns1:p>
+        </ns0:txBody>
+      </ns0:sp>
+      <ns0:sp>
+        <ns0:nvSpPr>
+          <ns0:cNvPr id="3" name="Rounded Rectangle 2"/>
+          <ns0:cNvSpPr/>
+          <ns0:nvPr/>
+        </ns0:nvSpPr>
+        <ns0:spPr>
+          <ns1:xfrm>
+            <ns1:off x="4419600" y="2390775"/>
+            <ns1:ext cx="3352800" cy="3000375"/>
+          </ns1:xfrm>
+          <ns1:prstGeom prst="roundRect">
+            <ns1:avLst>
+              <ns1:gd name="adj" fmla="val 5079"/>
+            </ns1:avLst>
+          </ns1:prstGeom>
+          <ns1:solidFill>
+            <ns1:srgbClr val="FFFFFF"/>
+          </ns1:solidFill>
+          <ns1:ln>
+            <ns1:noFill/>
+          </ns1:ln>
+          <ns1:effectLst/>
+        </ns0:spPr>
+        <ns0:style>
+          <ns1:lnRef idx="1">
+            <ns1:schemeClr val="accent1"/>
+          </ns1:lnRef>
+          <ns1:fillRef idx="3">
+            <ns1:schemeClr val="accent1"/>
+          </ns1:fillRef>
+          <ns1:effectRef idx="2">
+            <ns1:schemeClr val="accent1"/>
+          </ns1:effectRef>
+          <ns1:fontRef idx="minor">
+            <ns1:schemeClr val="lt1"/>
+          </ns1:fontRef>
+        </ns0:style>
+        <ns0:txBody>
+          <ns1:bodyPr rtlCol="0" anchor="ctr"/>
+          <ns1:lstStyle/>
+          <ns1:p>
+            <ns1:pPr algn="ctr"/>
+          </ns1:p>
+        </ns0:txBody>
+      </ns0:sp>
+      <ns0:sp>
+        <ns0:nvSpPr>
+          <ns0:cNvPr id="4" name="Rounded Rectangle 3"/>
+          <ns0:cNvSpPr/>
+          <ns0:nvPr/>
+        </ns0:nvSpPr>
+        <ns0:spPr>
+          <ns1:xfrm>
+            <ns1:off x="8077200" y="2152650"/>
+            <ns1:ext cx="3352800" cy="3476625"/>
+          </ns1:xfrm>
+          <ns1:prstGeom prst="roundRect">
+            <ns1:avLst>
+              <ns1:gd name="adj" fmla="val 4545"/>
+            </ns1:avLst>
+          </ns1:prstGeom>
+          <ns1:solidFill>
+            <ns1:srgbClr val="FFFFFF"/>
+          </ns1:solidFill>
+          <ns1:ln>
+            <ns1:noFill/>
+          </ns1:ln>
+          <ns1:effectLst/>
+        </ns0:spPr>
+        <ns0:style>
+          <ns1:lnRef idx="1">
+            <ns1:schemeClr val="accent1"/>
+          </ns1:lnRef>
+          <ns1:fillRef idx="3">
+            <ns1:schemeClr val="accent1"/>
+          </ns1:fillRef>
+          <ns1:effectRef idx="2">
+            <ns1:schemeClr val="accent1"/>
+          </ns1:effectRef>
+          <ns1:fontRef idx="minor">
+            <ns1:schemeClr val="lt1"/>
+          </ns1:fontRef>
+        </ns0:style>
+        <ns0:txBody>
+          <ns1:bodyPr rtlCol="0" anchor="ctr"/>
+          <ns1:lstStyle/>
+          <ns1:p>
+            <ns1:pPr algn="ctr"/>
+          </ns1:p>
+        </ns0:txBody>
+      </ns0:sp>
+      <ns0:pic>
+        <ns0:nvPicPr>
+          <ns0:cNvPr id="5" name="Picture 4" descr="image.png"/>
+          <ns0:cNvPicPr>
+            <ns1:picLocks noChangeAspect="1"/>
+          </ns0:cNvPicPr>
+          <ns0:nvPr/>
+        </ns0:nvPicPr>
+        <ns0:blipFill>
+          <ns1:blip ns2:embed="rId2"/>
+          <ns1:stretch>
+            <ns1:fillRect/>
+          </ns1:stretch>
+        </ns0:blipFill>
+        <ns0:spPr>
+          <ns1:xfrm>
+            <ns1:off x="1143000" y="2833687"/>
+            <ns1:ext cx="476250" cy="381000"/>
+          </ns1:xfrm>
+          <ns1:prstGeom prst="rect">
+            <ns1:avLst/>
+          </ns1:prstGeom>
+        </ns0:spPr>
+      </ns0:pic>
+      <ns0:pic>
+        <ns0:nvPicPr>
+          <ns0:cNvPr id="6" name="Picture 5" descr="image.png"/>
+          <ns0:cNvPicPr>
+            <ns1:picLocks noChangeAspect="1"/>
+          </ns0:cNvPicPr>
+          <ns0:nvPr/>
+        </ns0:nvPicPr>
+        <ns0:blipFill>
+          <ns1:blip ns2:embed="rId3"/>
+          <ns1:stretch>
+            <ns1:fillRect/>
+          </ns1:stretch>
+        </ns0:blipFill>
+        <ns0:spPr>
+          <ns1:xfrm>
+            <ns1:off x="4800600" y="2771775"/>
+            <ns1:ext cx="381000" cy="381000"/>
+          </ns1:xfrm>
+          <ns1:prstGeom prst="rect">
+            <ns1:avLst/>
+          </ns1:prstGeom>
+        </ns0:spPr>
+      </ns0:pic>
+      <ns0:pic>
+        <ns0:nvPicPr>
+          <ns0:cNvPr id="7" name="Picture 6" descr="image.png"/>
+          <ns0:cNvPicPr>
+            <ns1:picLocks noChangeAspect="1"/>
+          </ns0:cNvPicPr>
+          <ns0:nvPr/>
+        </ns0:nvPicPr>
+        <ns0:blipFill>
+          <ns1:blip ns2:embed="rId4"/>
+          <ns1:stretch>
+            <ns1:fillRect/>
+          </ns1:stretch>
+        </ns0:blipFill>
+        <ns0:spPr>
+          <ns1:xfrm>
+            <ns1:off x="8458200" y="2533650"/>
+            <ns1:ext cx="476250" cy="381000"/>
+          </ns1:xfrm>
+          <ns1:prstGeom prst="rect">
+            <ns1:avLst/>
+          </ns1:prstGeom>
+        </ns0:spPr>
+      </ns0:pic>
+      <ns0:sp>
+        <ns0:nvSpPr>
+          <ns0:cNvPr id="8" name="TextBox 7"/>
+          <ns0:cNvSpPr txBox="1"/>
+          <ns0:nvPr/>
+        </ns0:nvSpPr>
+        <ns0:spPr>
+          <ns1:xfrm>
+            <ns1:off x="762000" y="762000"/>
+            <ns1:ext cx="11430000" cy="466725"/>
+          </ns1:xfrm>
+          <ns1:prstGeom prst="rect">
+            <ns1:avLst/>
+          </ns1:prstGeom>
+          <ns1:noFill/>
+        </ns0:spPr>
+        <ns0:txBody>
+          <ns1:bodyPr wrap="none" lIns="0" rIns="0" tIns="0" bIns="0" anchor="t">
+            <ns1:spAutoFit/>
+          </ns1:bodyPr>
+          <ns1:lstStyle/>
+          <ns1:p>
+            <ns1:pPr algn="l"/>
+            <ns1:r>
+              <ns1:rPr b="1" sz="3000" i="0" u="none">
+                <ns1:solidFill>
+                  <ns1:srgbClr val="0F172A"/>
+                </ns1:solidFill>
+                <ns1:latin typeface="Inter"/>
+              </ns1:rPr>
+              <ns1:t>Os Inimigos da Satisfação</ns1:t>
+            </ns1:r>
+          </ns1:p>
+        </ns0:txBody>
+      </ns0:sp>
+      <ns0:sp>
+        <ns0:nvSpPr>
+          <ns0:cNvPr id="9" name="TextBox 8"/>
+          <ns0:cNvSpPr txBox="1"/>
+          <ns0:nvPr/>
+        </ns0:nvSpPr>
+        <ns0:spPr>
+          <ns1:xfrm>
+            <ns1:off x="1143000" y="3443287"/>
+            <ns1:ext cx="3400425" cy="323850"/>
+          </ns1:xfrm>
+          <ns1:prstGeom prst="rect">
+            <ns1:avLst/>
+          </ns1:prstGeom>
+          <ns1:noFill/>
+        </ns0:spPr>
+        <ns0:txBody>
+          <ns1:bodyPr wrap="none" lIns="0" rIns="0" tIns="0" bIns="0" anchor="t">
+            <ns1:spAutoFit/>
+          </ns1:bodyPr>
+          <ns1:lstStyle/>
+          <ns1:p>
+            <ns1:pPr algn="l"/>
+            <ns1:r>
+              <ns1:rPr b="1" sz="2100" i="0" u="none">
+                <ns1:solidFill>
+                  <ns1:srgbClr val="0F172A"/>
+                </ns1:solidFill>
+                <ns1:latin typeface="Inter"/>
+              </ns1:rPr>
+              <ns1:t>Atraso Logístico</ns1:t>
+            </ns1:r>
+          </ns1:p>
+        </ns0:txBody>
+      </ns0:sp>
+      <ns0:sp>
+        <ns0:nvSpPr>
+          <ns0:cNvPr id="10" name="TextBox 9"/>
+          <ns0:cNvSpPr txBox="1"/>
+          <ns0:nvPr/>
+        </ns0:nvSpPr>
+        <ns0:spPr>
+          <ns1:xfrm>
+            <ns1:off x="1143000" y="3919537"/>
+            <ns1:ext cx="3238500" cy="276225"/>
+          </ns1:xfrm>
+          <ns1:prstGeom prst="rect">
+            <ns1:avLst/>
+          </ns1:prstGeom>
+          <ns1:noFill/>
+        </ns0:spPr>
+        <ns0:txBody>
+          <ns1:bodyPr wrap="none" lIns="0" rIns="0" tIns="0" bIns="0" anchor="t">
+            <ns1:spAutoFit/>
+          </ns1:bodyPr>
+          <ns1:lstStyle/>
+          <ns1:p>
+            <ns1:pPr algn="l"/>
+            <ns1:r>
+              <ns1:rPr b="1" sz="1800" i="0" u="none">
+                <ns1:solidFill>
+                  <ns1:srgbClr val="E11D48"/>
+                </ns1:solidFill>
+                <ns1:latin typeface="Inter"/>
+              </ns1:rPr>
+              <ns1:t>rho = -0,59 (Spearman)</ns1:t>
+            </ns1:r>
+          </ns1:p>
+        </ns0:txBody>
+      </ns0:sp>
+      <ns0:sp>
+        <ns0:nvSpPr>
+          <ns0:cNvPr id="11" name="TextBox 10"/>
+          <ns0:cNvSpPr txBox="1"/>
+          <ns0:nvPr/>
+        </ns0:nvSpPr>
+        <ns0:spPr>
+          <ns1:xfrm>
+            <ns1:off x="1143000" y="4348162"/>
+            <ns1:ext cx="2686050" cy="600075"/>
+          </ns1:xfrm>
+          <ns1:prstGeom prst="rect">
+            <ns1:avLst/>
+          </ns1:prstGeom>
+          <ns1:noFill/>
+        </ns0:spPr>
+        <ns0:txBody>
+          <ns1:bodyPr wrap="square" lIns="0" rIns="0" tIns="0" bIns="0" anchor="t">
+            <ns1:spAutoFit/>
+          </ns1:bodyPr>
+          <ns1:lstStyle/>
+          <ns1:p>
+            <ns1:pPr algn="l"/>
+            <ns1:r>
+              <ns1:rPr b="0" sz="1350" i="0" u="none">
+                <ns1:solidFill>
+                  <ns1:srgbClr val="475569"/>
+                </ns1:solidFill>
+                <ns1:latin typeface="Inter"/>
+              </ns1:rPr>
+              <ns1:t>Associação negativa mais forte observada; sem prova de causa.</ns1:t>
+            </ns1:r>
+          </ns1:p>
+        </ns0:txBody>
+      </ns0:sp>
+      <ns0:sp>
+        <ns0:nvSpPr>
+          <ns0:cNvPr id="12" name="TextBox 11"/>
+          <ns0:cNvSpPr txBox="1"/>
+          <ns0:nvPr/>
+        </ns0:nvSpPr>
+        <ns0:spPr>
+          <ns1:xfrm>
+            <ns1:off x="4800600" y="3381375"/>
+            <ns1:ext cx="2820352" cy="647700"/>
+          </ns1:xfrm>
+          <ns1:prstGeom prst="rect">
+            <ns1:avLst/>
+          </ns1:prstGeom>
+          <ns1:noFill/>
+        </ns0:spPr>
+        <ns0:txBody>
+          <ns1:bodyPr wrap="square" lIns="0" rIns="0" tIns="0" bIns="0" anchor="t">
+            <ns1:spAutoFit/>
+          </ns1:bodyPr>
+          <ns1:lstStyle/>
+          <ns1:p>
+            <ns1:pPr algn="l"/>
+            <ns1:r>
+              <ns1:rPr b="1" sz="2100" i="0" u="none">
+                <ns1:solidFill>
+                  <ns1:srgbClr val="0F172A"/>
+                </ns1:solidFill>
+                <ns1:latin typeface="Inter"/>
+              </ns1:rPr>
+              <ns1:t>Volume de Reclamações</ns1:t>
+            </ns1:r>
+          </ns1:p>
+        </ns0:txBody>
+      </ns0:sp>
+      <ns0:sp>
+        <ns0:nvSpPr>
+          <ns0:cNvPr id="13" name="TextBox 12"/>
+          <ns0:cNvSpPr txBox="1"/>
+          <ns0:nvPr/>
+        </ns0:nvSpPr>
+        <ns0:spPr>
+          <ns1:xfrm>
+            <ns1:off x="4800600" y="4181475"/>
+            <ns1:ext cx="3238500" cy="276225"/>
+          </ns1:xfrm>
+          <ns1:prstGeom prst="rect">
+            <ns1:avLst/>
+          </ns1:prstGeom>
+          <ns1:noFill/>
+        </ns0:spPr>
+        <ns0:txBody>
+          <ns1:bodyPr wrap="none" lIns="0" rIns="0" tIns="0" bIns="0" anchor="t">
+            <ns1:spAutoFit/>
+          </ns1:bodyPr>
+          <ns1:lstStyle/>
+          <ns1:p>
+            <ns1:pPr algn="l"/>
+            <ns1:r>
+              <ns1:rPr b="1" sz="1800" i="0" u="none">
+                <ns1:solidFill>
+                  <ns1:srgbClr val="E11D48"/>
+                </ns1:solidFill>
+                <ns1:latin typeface="Inter"/>
+              </ns1:rPr>
+              <ns1:t>rho = -0,49 (Spearman)</ns1:t>
+            </ns1:r>
+          </ns1:p>
+        </ns0:txBody>
+      </ns0:sp>
+      <ns0:sp>
+        <ns0:nvSpPr>
+          <ns0:cNvPr id="14" name="TextBox 13"/>
+          <ns0:cNvSpPr txBox="1"/>
+          <ns0:nvPr/>
+        </ns0:nvSpPr>
+        <ns0:spPr>
+          <ns1:xfrm>
+            <ns1:off x="4800600" y="4610100"/>
+            <ns1:ext cx="2686050" cy="400050"/>
+          </ns1:xfrm>
+          <ns1:prstGeom prst="rect">
+            <ns1:avLst/>
+          </ns1:prstGeom>
+          <ns1:noFill/>
+        </ns0:spPr>
+        <ns0:txBody>
+          <ns1:bodyPr wrap="square" lIns="0" rIns="0" tIns="0" bIns="0" anchor="t">
+            <ns1:spAutoFit/>
+          </ns1:bodyPr>
+          <ns1:lstStyle/>
+          <ns1:p>
+            <ns1:pPr algn="l"/>
+            <ns1:r>
+              <ns1:rPr b="0" sz="1350" i="0" u="none">
+                <ns1:solidFill>
+                  <ns1:srgbClr val="475569"/>
+                </ns1:solidFill>
+                <ns1:latin typeface="Inter"/>
+              </ns1:rPr>
+              <ns1:t>Associação negativa observada; reclamação também reflete a experiência.</ns1:t>
+            </ns1:r>
+          </ns1:p>
+        </ns0:txBody>
+      </ns0:sp>
+      <ns0:sp>
+        <ns0:nvSpPr>
+          <ns0:cNvPr id="15" name="TextBox 14"/>
+          <ns0:cNvSpPr txBox="1"/>
+          <ns0:nvPr/>
+        </ns0:nvSpPr>
+        <ns0:spPr>
+          <ns1:xfrm>
+            <ns1:off x="8458200" y="3143250"/>
+            <ns1:ext cx="2820352" cy="647700"/>
+          </ns1:xfrm>
+          <ns1:prstGeom prst="rect">
+            <ns1:avLst/>
+          </ns1:prstGeom>
+          <ns1:noFill/>
+        </ns0:spPr>
+        <ns0:txBody>
+          <ns1:bodyPr wrap="square" lIns="0" rIns="0" tIns="0" bIns="0" anchor="t">
+            <ns1:spAutoFit/>
+          </ns1:bodyPr>
+          <ns1:lstStyle/>
+          <ns1:p>
+            <ns1:pPr algn="l"/>
+            <ns1:r>
+              <ns1:rPr b="1" sz="2100" i="0" u="none">
+                <ns1:solidFill>
+                  <ns1:srgbClr val="0F172A"/>
+                </ns1:solidFill>
+                <ns1:latin typeface="Inter"/>
+              </ns1:rPr>
+              <ns1:t>Tentativas de Entrega</ns1:t>
+            </ns1:r>
+          </ns1:p>
+        </ns0:txBody>
+      </ns0:sp>
+      <ns0:sp>
+        <ns0:nvSpPr>
+          <ns0:cNvPr id="16" name="TextBox 15"/>
+          <ns0:cNvSpPr txBox="1"/>
+          <ns0:nvPr/>
+        </ns0:nvSpPr>
+        <ns0:spPr>
+          <ns1:xfrm>
+            <ns1:off x="8458200" y="3943350"/>
+            <ns1:ext cx="2686050" cy="552450"/>
+          </ns1:xfrm>
+          <ns1:prstGeom prst="rect">
+            <ns1:avLst/>
+          </ns1:prstGeom>
+          <ns1:noFill/>
+        </ns0:spPr>
+        <ns0:txBody>
+          <ns1:bodyPr wrap="square" lIns="0" rIns="0" tIns="0" bIns="0" anchor="t">
+            <ns1:spAutoFit/>
+          </ns1:bodyPr>
+          <ns1:lstStyle/>
+          <ns1:p>
+            <ns1:pPr algn="l"/>
+            <ns1:r>
+              <ns1:rPr b="1" sz="1800" i="0" u="none">
+                <ns1:solidFill>
+                  <ns1:srgbClr val="0F172A"/>
+                </ns1:solidFill>
+                <ns1:latin typeface="Inter"/>
+              </ns1:rPr>
+              <ns1:t>rho = +0,03 (Spearman)</ns1:t>
+            </ns1:r>
+          </ns1:p>
+        </ns0:txBody>
+      </ns0:sp>
+      <ns0:sp>
+        <ns0:nvSpPr>
+          <ns0:cNvPr id="17" name="TextBox 16"/>
+          <ns0:cNvSpPr txBox="1"/>
+          <ns0:nvPr/>
+        </ns0:nvSpPr>
+        <ns0:spPr>
+          <ns1:xfrm>
+            <ns1:off x="8458200" y="4648200"/>
+            <ns1:ext cx="2686050" cy="600075"/>
+          </ns1:xfrm>
+          <ns1:prstGeom prst="rect">
+            <ns1:avLst/>
+          </ns1:prstGeom>
+          <ns1:noFill/>
+        </ns0:spPr>
+        <ns0:txBody>
+          <ns1:bodyPr wrap="square" lIns="0" rIns="0" tIns="0" bIns="0" anchor="t">
+            <ns1:spAutoFit/>
+          </ns1:bodyPr>
+          <ns1:lstStyle/>
+          <ns1:p>
+            <ns1:pPr algn="l"/>
+            <ns1:r>
+              <ns1:rPr b="0" sz="1350" i="0" u="none">
+                <ns1:solidFill>
+                  <ns1:srgbClr val="475569"/>
+                </ns1:solidFill>
+                <ns1:latin typeface="Inter"/>
+              </ns1:rPr>
+              <ns1:t>Não observamos associação relevante nesta amostra.</ns1:t>
+            </ns1:r>
+          </ns1:p>
+        </ns0:txBody>
+      </ns0:sp>
+    </ns0:spTree>
+  </ns0:cSld>
+  <ns0:clrMapOvr>
+    <ns1:masterClrMapping/>
+  </ns0:clrMapOvr>
+</ns0:sld>
 </file>
 
 <file path=ppt/slides/slide5.xml><?xml version="1.0" encoding="utf-8"?>
-<p:sld xmlns:a="http://schemas.openxmlformats.org/drawingml/2006/main" xmlns:p="http://schemas.openxmlformats.org/presentationml/2006/main" xmlns:r="http://schemas.openxmlformats.org/officeDocument/2006/relationships">
-  <p:cSld>
-    <p:bg>
-      <p:bgPr>
-        <a:solidFill>
-          <a:srgbClr val="FFFFFF"/>
-        </a:solidFill>
-        <a:effectLst/>
-      </p:bgPr>
-    </p:bg>
-    <p:spTree>
-      <p:nvGrpSpPr>
-        <p:cNvPr id="1" name=""/>
-        <p:cNvGrpSpPr/>
-        <p:nvPr/>
-      </p:nvGrpSpPr>
-      <p:grpSpPr/>
-      <p:sp>
-        <p:nvSpPr>
-          <p:cNvPr id="2" name="TextBox 1"/>
-          <p:cNvSpPr txBox="1"/>
-          <p:nvPr/>
-        </p:nvSpPr>
-        <p:spPr>
-          <a:xfrm>
-            <a:off x="-285750" y="762000"/>
-            <a:ext cx="12763500" cy="466725"/>
-          </a:xfrm>
-          <a:prstGeom prst="rect">
-            <a:avLst/>
-          </a:prstGeom>
-          <a:noFill/>
-        </p:spPr>
-        <p:txBody>
-          <a:bodyPr wrap="none" lIns="0" rIns="0" tIns="0" bIns="0" anchor="t">
-            <a:spAutoFit/>
-          </a:bodyPr>
-          <a:lstStyle/>
-          <a:p>
-            <a:pPr algn="ctr"/>
-            <a:r>
-              <a:rPr b="1" sz="3000" i="0" u="none">
-                <a:solidFill>
-                  <a:srgbClr val="0F172A"/>
-                </a:solidFill>
-                <a:latin typeface="Inter"/>
-              </a:rPr>
-              <a:t>Tolerância Zero Logística</a:t>
-            </a:r>
-          </a:p>
-        </p:txBody>
-      </p:sp>
-      <p:sp>
-        <p:nvSpPr>
-          <p:cNvPr id="3" name="TextBox 2"/>
-          <p:cNvSpPr txBox="1"/>
-          <p:nvPr/>
-        </p:nvSpPr>
-        <p:spPr>
-          <a:xfrm>
-            <a:off x="-285750" y="1381125"/>
-            <a:ext cx="12763500" cy="228600"/>
-          </a:xfrm>
-          <a:prstGeom prst="rect">
-            <a:avLst/>
-          </a:prstGeom>
-          <a:noFill/>
-        </p:spPr>
-        <p:txBody>
-          <a:bodyPr wrap="none" lIns="0" rIns="0" tIns="0" bIns="0" anchor="t">
-            <a:spAutoFit/>
-          </a:bodyPr>
-          <a:lstStyle/>
-          <a:p>
-            <a:pPr algn="ctr"/>
-            <a:r>
-              <a:rPr b="0" sz="1500" i="0" u="none">
-                <a:solidFill>
-                  <a:srgbClr val="64748B"/>
-                </a:solidFill>
-                <a:latin typeface="Inter"/>
-              </a:rPr>
-              <a:t>O limite da paciência do cliente antes de se tornar um detrator.</a:t>
-            </a:r>
-          </a:p>
-        </p:txBody>
-      </p:sp>
-      <p:sp>
-        <p:nvSpPr>
-          <p:cNvPr id="4" name="TextBox 3"/>
-          <p:cNvSpPr txBox="1"/>
-          <p:nvPr/>
-        </p:nvSpPr>
-        <p:spPr>
-          <a:xfrm>
-            <a:off x="4600575" y="2867025"/>
-            <a:ext cx="3738562" cy="1371600"/>
-          </a:xfrm>
-          <a:prstGeom prst="rect">
-            <a:avLst/>
-          </a:prstGeom>
-          <a:noFill/>
-        </p:spPr>
-        <p:txBody>
-          <a:bodyPr wrap="none" lIns="0" rIns="0" tIns="0" bIns="0" anchor="t">
-            <a:spAutoFit/>
-          </a:bodyPr>
-          <a:lstStyle/>
-          <a:p>
-            <a:pPr algn="l">
-              <a:lnSpc>
-                <a:spcPts val="10800"/>
-              </a:lnSpc>
-            </a:pPr>
-            <a:r>
-              <a:rPr b="1" sz="10800" i="0" u="none">
-                <a:solidFill>
-                  <a:srgbClr val="E11D48"/>
-                </a:solidFill>
-                <a:latin typeface="Inter"/>
-              </a:rPr>
-              <a:t>1 dia</a:t>
-            </a:r>
-          </a:p>
-        </p:txBody>
-      </p:sp>
-      <p:sp>
-        <p:nvSpPr>
-          <p:cNvPr id="5" name="TextBox 4"/>
-          <p:cNvSpPr txBox="1"/>
-          <p:nvPr/>
-        </p:nvSpPr>
-        <p:spPr>
-          <a:xfrm>
-            <a:off x="3776662" y="4467225"/>
-            <a:ext cx="5798343" cy="276225"/>
-          </a:xfrm>
-          <a:prstGeom prst="rect">
-            <a:avLst/>
-          </a:prstGeom>
-          <a:noFill/>
-        </p:spPr>
-        <p:txBody>
-          <a:bodyPr wrap="none" lIns="0" rIns="0" tIns="0" bIns="0" anchor="t">
-            <a:spAutoFit/>
-          </a:bodyPr>
-          <a:lstStyle/>
-          <a:p>
-            <a:pPr algn="l"/>
-            <a:r>
-              <a:rPr b="1" sz="1800" i="0" u="none">
-                <a:solidFill>
-                  <a:srgbClr val="0F172A"/>
-                </a:solidFill>
-                <a:latin typeface="Inter"/>
-              </a:rPr>
-              <a:t>De atraso despenca o NPS médio para 5.5</a:t>
-            </a:r>
-          </a:p>
-        </p:txBody>
-      </p:sp>
-      <p:sp>
-        <p:nvSpPr>
-          <p:cNvPr id="6" name="TextBox 5"/>
-          <p:cNvSpPr txBox="1"/>
-          <p:nvPr/>
-        </p:nvSpPr>
-        <p:spPr>
-          <a:xfrm>
-            <a:off x="2524125" y="4895850"/>
-            <a:ext cx="7143750" cy="400050"/>
-          </a:xfrm>
-          <a:prstGeom prst="rect">
-            <a:avLst/>
-          </a:prstGeom>
-          <a:noFill/>
-        </p:spPr>
-        <p:txBody>
-          <a:bodyPr wrap="square" lIns="0" rIns="0" tIns="0" bIns="0" anchor="t">
-            <a:spAutoFit/>
-          </a:bodyPr>
-          <a:lstStyle/>
-          <a:p>
-            <a:pPr algn="ctr"/>
-            <a:r>
-              <a:rPr b="0" sz="1350" i="0" u="none">
-                <a:solidFill>
-                  <a:srgbClr val="475569"/>
-                </a:solidFill>
-                <a:latin typeface="Inter"/>
-              </a:rPr>
-              <a:t>A insatisfação não cresce de forma linear. Logo no primeiro dia de falha no prazo, o consumidor afunda na zona de detração.</a:t>
-            </a:r>
-          </a:p>
-        </p:txBody>
-      </p:sp>
-    </p:spTree>
-  </p:cSld>
-  <p:clrMapOvr>
-    <a:masterClrMapping/>
-  </p:clrMapOvr>
-</p:sld>
+<ns0:sld xmlns:ns0="http://schemas.openxmlformats.org/presentationml/2006/main" xmlns:ns1="http://schemas.openxmlformats.org/drawingml/2006/main">
+  <ns0:cSld>
+    <ns0:bg>
+      <ns0:bgPr>
+        <ns1:solidFill>
+          <ns1:srgbClr val="FFFFFF"/>
+        </ns1:solidFill>
+        <ns1:effectLst/>
+      </ns0:bgPr>
+    </ns0:bg>
+    <ns0:spTree>
+      <ns0:nvGrpSpPr>
+        <ns0:cNvPr id="1" name=""/>
+        <ns0:cNvGrpSpPr/>
+        <ns0:nvPr/>
+      </ns0:nvGrpSpPr>
+      <ns0:grpSpPr/>
+      <ns0:sp>
+        <ns0:nvSpPr>
+          <ns0:cNvPr id="2" name="TextBox 1"/>
+          <ns0:cNvSpPr txBox="1"/>
+          <ns0:nvPr/>
+        </ns0:nvSpPr>
+        <ns0:spPr>
+          <ns1:xfrm>
+            <ns1:off x="-285750" y="762000"/>
+            <ns1:ext cx="12763500" cy="466725"/>
+          </ns1:xfrm>
+          <ns1:prstGeom prst="rect">
+            <ns1:avLst/>
+          </ns1:prstGeom>
+          <ns1:noFill/>
+        </ns0:spPr>
+        <ns0:txBody>
+          <ns1:bodyPr wrap="none" lIns="0" rIns="0" tIns="0" bIns="0" anchor="t">
+            <ns1:spAutoFit/>
+          </ns1:bodyPr>
+          <ns1:lstStyle/>
+          <ns1:p>
+            <ns1:pPr algn="ctr"/>
+            <ns1:r>
+              <ns1:rPr b="1" sz="3000" i="0" u="none">
+                <ns1:solidFill>
+                  <ns1:srgbClr val="0F172A"/>
+                </ns1:solidFill>
+                <ns1:latin typeface="Inter"/>
+              </ns1:rPr>
+              <ns1:t>O primeiro dia de atraso merece atenção</ns1:t>
+            </ns1:r>
+          </ns1:p>
+        </ns0:txBody>
+      </ns0:sp>
+      <ns0:sp>
+        <ns0:nvSpPr>
+          <ns0:cNvPr id="3" name="TextBox 2"/>
+          <ns0:cNvSpPr txBox="1"/>
+          <ns0:nvPr/>
+        </ns0:nvSpPr>
+        <ns0:spPr>
+          <ns1:xfrm>
+            <ns1:off x="-285750" y="1381125"/>
+            <ns1:ext cx="12763500" cy="228600"/>
+          </ns1:xfrm>
+          <ns1:prstGeom prst="rect">
+            <ns1:avLst/>
+          </ns1:prstGeom>
+          <ns1:noFill/>
+        </ns0:spPr>
+        <ns0:txBody>
+          <ns1:bodyPr wrap="none" lIns="0" rIns="0" tIns="0" bIns="0" anchor="t">
+            <ns1:spAutoFit/>
+          </ns1:bodyPr>
+          <ns1:lstStyle/>
+          <ns1:p>
+            <ns1:pPr algn="ctr"/>
+            <ns1:r>
+              <ns1:rPr b="0" sz="1500" i="0" u="none">
+                <ns1:solidFill>
+                  <ns1:srgbClr val="64748B"/>
+                </ns1:solidFill>
+                <ns1:latin typeface="Inter"/>
+              </ns1:rPr>
+              <ns1:t>Maior queda observada entre pedidos sem atraso e com um dia de atraso.</ns1:t>
+            </ns1:r>
+          </ns1:p>
+        </ns0:txBody>
+      </ns0:sp>
+      <ns0:sp>
+        <ns0:nvSpPr>
+          <ns0:cNvPr id="4" name="TextBox 3"/>
+          <ns0:cNvSpPr txBox="1"/>
+          <ns0:nvPr/>
+        </ns0:nvSpPr>
+        <ns0:spPr>
+          <ns1:xfrm>
+            <ns1:off x="4600575" y="2867025"/>
+            <ns1:ext cx="3738562" cy="1371600"/>
+          </ns1:xfrm>
+          <ns1:prstGeom prst="rect">
+            <ns1:avLst/>
+          </ns1:prstGeom>
+          <ns1:noFill/>
+        </ns0:spPr>
+        <ns0:txBody>
+          <ns1:bodyPr wrap="none" lIns="0" rIns="0" tIns="0" bIns="0" anchor="t">
+            <ns1:spAutoFit/>
+          </ns1:bodyPr>
+          <ns1:lstStyle/>
+          <ns1:p>
+            <ns1:pPr algn="l">
+              <ns1:lnSpc>
+                <ns1:spcPts val="10800"/>
+              </ns1:lnSpc>
+            </ns1:pPr>
+            <ns1:r>
+              <ns1:rPr b="1" sz="10800" i="0" u="none">
+                <ns1:solidFill>
+                  <ns1:srgbClr val="E11D48"/>
+                </ns1:solidFill>
+                <ns1:latin typeface="Inter"/>
+              </ns1:rPr>
+              <ns1:t>1 dia</ns1:t>
+            </ns1:r>
+          </ns1:p>
+        </ns0:txBody>
+      </ns0:sp>
+      <ns0:sp>
+        <ns0:nvSpPr>
+          <ns0:cNvPr id="5" name="TextBox 4"/>
+          <ns0:cNvSpPr txBox="1"/>
+          <ns0:nvPr/>
+        </ns0:nvSpPr>
+        <ns0:spPr>
+          <ns1:xfrm>
+            <ns1:off x="3776662" y="4467225"/>
+            <ns1:ext cx="5798343" cy="276225"/>
+          </ns1:xfrm>
+          <ns1:prstGeom prst="rect">
+            <ns1:avLst/>
+          </ns1:prstGeom>
+          <ns1:noFill/>
+        </ns0:spPr>
+        <ns0:txBody>
+          <ns1:bodyPr wrap="none" lIns="0" rIns="0" tIns="0" bIns="0" anchor="t">
+            <ns1:spAutoFit/>
+          </ns1:bodyPr>
+          <ns1:lstStyle/>
+          <ns1:p>
+            <ns1:pPr algn="l"/>
+            <ns1:r>
+              <ns1:rPr b="1" sz="1800" i="0" u="none">
+                <ns1:solidFill>
+                  <ns1:srgbClr val="0F172A"/>
+                </ns1:solidFill>
+                <ns1:latin typeface="Inter"/>
+              </ns1:rPr>
+              <ns1:t>NPS médio: 6,86 → 5,55; detratores: 36% → 60% (n=277 e n=615).</ns1:t>
+            </ns1:r>
+          </ns1:p>
+        </ns0:txBody>
+      </ns0:sp>
+      <ns0:sp>
+        <ns0:nvSpPr>
+          <ns0:cNvPr id="6" name="TextBox 5"/>
+          <ns0:cNvSpPr txBox="1"/>
+          <ns0:nvPr/>
+        </ns0:nvSpPr>
+        <ns0:spPr>
+          <ns1:xfrm>
+            <ns1:off x="2524125" y="4895850"/>
+            <ns1:ext cx="7143750" cy="400050"/>
+          </ns1:xfrm>
+          <ns1:prstGeom prst="rect">
+            <ns1:avLst/>
+          </ns1:prstGeom>
+          <ns1:noFill/>
+        </ns0:spPr>
+        <ns0:txBody>
+          <ns1:bodyPr wrap="square" lIns="0" rIns="0" tIns="0" bIns="0" anchor="t">
+            <ns1:spAutoFit/>
+          </ns1:bodyPr>
+          <ns1:lstStyle/>
+          <ns1:p>
+            <ns1:pPr algn="ctr"/>
+            <ns1:r>
+              <ns1:rPr b="0" sz="1350" i="0" u="none">
+                <ns1:solidFill>
+                  <ns1:srgbClr val="475569"/>
+                </ns1:solidFill>
+                <ns1:latin typeface="Inter"/>
+              </ns1:rPr>
+              <ns1:t>Padrão descritivo da amostra; não demonstra um limiar causal.</ns1:t>
+            </ns1:r>
+          </ns1:p>
+        </ns0:txBody>
+      </ns0:sp>
+    </ns0:spTree>
+  </ns0:cSld>
+  <ns0:clrMapOvr>
+    <ns1:masterClrMapping/>
+  </ns0:clrMapOvr>
+</ns0:sld>
 </file>
 
 <file path=ppt/slides/slide6.xml><?xml version="1.0" encoding="utf-8"?>
-<p:sld xmlns:a="http://schemas.openxmlformats.org/drawingml/2006/main" xmlns:p="http://schemas.openxmlformats.org/presentationml/2006/main" xmlns:r="http://schemas.openxmlformats.org/officeDocument/2006/relationships">
-  <p:cSld>
-    <p:bg>
-      <p:bgPr>
-        <a:solidFill>
-          <a:srgbClr val="F8FAFC"/>
-        </a:solidFill>
-        <a:effectLst/>
-      </p:bgPr>
-    </p:bg>
-    <p:spTree>
-      <p:nvGrpSpPr>
-        <p:cNvPr id="1" name=""/>
-        <p:cNvGrpSpPr/>
-        <p:nvPr/>
-      </p:nvGrpSpPr>
-      <p:grpSpPr/>
-      <p:sp>
-        <p:nvSpPr>
-          <p:cNvPr id="2" name="Rectangle 1"/>
-          <p:cNvSpPr/>
-          <p:nvPr/>
-        </p:nvSpPr>
-        <p:spPr>
-          <a:xfrm>
-            <a:off x="6091237" y="1838325"/>
-            <a:ext cx="9525" cy="4257675"/>
-          </a:xfrm>
-          <a:prstGeom prst="rect">
-            <a:avLst/>
-          </a:prstGeom>
-          <a:solidFill>
-            <a:srgbClr val="CBD5E1"/>
-          </a:solidFill>
-          <a:ln>
-            <a:noFill/>
-          </a:ln>
-          <a:effectLst/>
-        </p:spPr>
-        <p:style>
-          <a:lnRef idx="1">
-            <a:schemeClr val="accent1"/>
-          </a:lnRef>
-          <a:fillRef idx="3">
-            <a:schemeClr val="accent1"/>
-          </a:fillRef>
-          <a:effectRef idx="2">
-            <a:schemeClr val="accent1"/>
-          </a:effectRef>
-          <a:fontRef idx="minor">
-            <a:schemeClr val="lt1"/>
-          </a:fontRef>
-        </p:style>
-        <p:txBody>
-          <a:bodyPr rtlCol="0" anchor="ctr"/>
-          <a:lstStyle/>
-          <a:p>
-            <a:pPr algn="ctr"/>
-          </a:p>
-        </p:txBody>
-      </p:sp>
-      <p:sp>
-        <p:nvSpPr>
-          <p:cNvPr id="3" name="Rectangle 2"/>
-          <p:cNvSpPr/>
-          <p:nvPr/>
-        </p:nvSpPr>
-        <p:spPr>
-          <a:xfrm>
-            <a:off x="762000" y="1838325"/>
-            <a:ext cx="4719637" cy="447675"/>
-          </a:xfrm>
-          <a:prstGeom prst="rect">
-            <a:avLst/>
-          </a:prstGeom>
-          <a:noFill/>
-          <a:ln>
-            <a:noFill/>
-          </a:ln>
-          <a:effectLst/>
-        </p:spPr>
-        <p:style>
-          <a:lnRef idx="1">
-            <a:schemeClr val="accent1"/>
-          </a:lnRef>
-          <a:fillRef idx="3">
-            <a:schemeClr val="accent1"/>
-          </a:fillRef>
-          <a:effectRef idx="2">
-            <a:schemeClr val="accent1"/>
-          </a:effectRef>
-          <a:fontRef idx="minor">
-            <a:schemeClr val="lt1"/>
-          </a:fontRef>
-        </p:style>
-        <p:txBody>
-          <a:bodyPr rtlCol="0" anchor="ctr"/>
-          <a:lstStyle/>
-          <a:p>
-            <a:pPr algn="ctr"/>
-          </a:p>
-        </p:txBody>
-      </p:sp>
-      <p:sp>
-        <p:nvSpPr>
-          <p:cNvPr id="4" name="Rectangle 3"/>
-          <p:cNvSpPr/>
-          <p:nvPr/>
-        </p:nvSpPr>
-        <p:spPr>
-          <a:xfrm>
-            <a:off x="6710362" y="1838325"/>
-            <a:ext cx="4719637" cy="447675"/>
-          </a:xfrm>
-          <a:prstGeom prst="rect">
-            <a:avLst/>
-          </a:prstGeom>
-          <a:noFill/>
-          <a:ln>
-            <a:noFill/>
-          </a:ln>
-          <a:effectLst/>
-        </p:spPr>
-        <p:style>
-          <a:lnRef idx="1">
-            <a:schemeClr val="accent1"/>
-          </a:lnRef>
-          <a:fillRef idx="3">
-            <a:schemeClr val="accent1"/>
-          </a:fillRef>
-          <a:effectRef idx="2">
-            <a:schemeClr val="accent1"/>
-          </a:effectRef>
-          <a:fontRef idx="minor">
-            <a:schemeClr val="lt1"/>
-          </a:fontRef>
-        </p:style>
-        <p:txBody>
-          <a:bodyPr rtlCol="0" anchor="ctr"/>
-          <a:lstStyle/>
-          <a:p>
-            <a:pPr algn="ctr"/>
-          </a:p>
-        </p:txBody>
-      </p:sp>
-      <p:sp>
-        <p:nvSpPr>
-          <p:cNvPr id="5" name="Rectangle 4"/>
-          <p:cNvSpPr/>
-          <p:nvPr/>
-        </p:nvSpPr>
-        <p:spPr>
-          <a:xfrm>
-            <a:off x="762000" y="2266950"/>
-            <a:ext cx="4719637" cy="19050"/>
-          </a:xfrm>
-          <a:prstGeom prst="rect">
-            <a:avLst/>
-          </a:prstGeom>
-          <a:solidFill>
-            <a:srgbClr val="E2E8F0"/>
-          </a:solidFill>
-          <a:ln>
-            <a:noFill/>
-          </a:ln>
-          <a:effectLst/>
-        </p:spPr>
-        <p:style>
-          <a:lnRef idx="1">
-            <a:schemeClr val="accent1"/>
-          </a:lnRef>
-          <a:fillRef idx="3">
-            <a:schemeClr val="accent1"/>
-          </a:fillRef>
-          <a:effectRef idx="2">
-            <a:schemeClr val="accent1"/>
-          </a:effectRef>
-          <a:fontRef idx="minor">
-            <a:schemeClr val="lt1"/>
-          </a:fontRef>
-        </p:style>
-        <p:txBody>
-          <a:bodyPr rtlCol="0" anchor="ctr"/>
-          <a:lstStyle/>
-          <a:p>
-            <a:pPr algn="ctr"/>
-          </a:p>
-        </p:txBody>
-      </p:sp>
-      <p:sp>
-        <p:nvSpPr>
-          <p:cNvPr id="6" name="Rectangle 5"/>
-          <p:cNvSpPr/>
-          <p:nvPr/>
-        </p:nvSpPr>
-        <p:spPr>
-          <a:xfrm>
-            <a:off x="6710362" y="2266950"/>
-            <a:ext cx="4719637" cy="19050"/>
-          </a:xfrm>
-          <a:prstGeom prst="rect">
-            <a:avLst/>
-          </a:prstGeom>
-          <a:solidFill>
-            <a:srgbClr val="E2E8F0"/>
-          </a:solidFill>
-          <a:ln>
-            <a:noFill/>
-          </a:ln>
-          <a:effectLst/>
-        </p:spPr>
-        <p:style>
-          <a:lnRef idx="1">
-            <a:schemeClr val="accent1"/>
-          </a:lnRef>
-          <a:fillRef idx="3">
-            <a:schemeClr val="accent1"/>
-          </a:fillRef>
-          <a:effectRef idx="2">
-            <a:schemeClr val="accent1"/>
-          </a:effectRef>
-          <a:fontRef idx="minor">
-            <a:schemeClr val="lt1"/>
-          </a:fontRef>
-        </p:style>
-        <p:txBody>
-          <a:bodyPr rtlCol="0" anchor="ctr"/>
-          <a:lstStyle/>
-          <a:p>
-            <a:pPr algn="ctr"/>
-          </a:p>
-        </p:txBody>
-      </p:sp>
-      <p:sp>
-        <p:nvSpPr>
-          <p:cNvPr id="7" name="TextBox 6"/>
-          <p:cNvSpPr txBox="1"/>
-          <p:nvPr/>
-        </p:nvSpPr>
-        <p:spPr>
-          <a:xfrm>
-            <a:off x="762000" y="762000"/>
-            <a:ext cx="11430000" cy="466725"/>
-          </a:xfrm>
-          <a:prstGeom prst="rect">
-            <a:avLst/>
-          </a:prstGeom>
-          <a:noFill/>
-        </p:spPr>
-        <p:txBody>
-          <a:bodyPr wrap="none" lIns="0" rIns="0" tIns="0" bIns="0" anchor="t">
-            <a:spAutoFit/>
-          </a:bodyPr>
-          <a:lstStyle/>
-          <a:p>
-            <a:pPr algn="l"/>
-            <a:r>
-              <a:rPr b="1" sz="3000" i="0" u="none">
-                <a:solidFill>
-                  <a:srgbClr val="0F172A"/>
-                </a:solidFill>
-                <a:latin typeface="Inter"/>
-              </a:rPr>
-              <a:t>O Gargalo do Atendimento</a:t>
-            </a:r>
-          </a:p>
-        </p:txBody>
-      </p:sp>
-      <p:sp>
-        <p:nvSpPr>
-          <p:cNvPr id="8" name="TextBox 7"/>
-          <p:cNvSpPr txBox="1"/>
-          <p:nvPr/>
-        </p:nvSpPr>
-        <p:spPr>
-          <a:xfrm>
-            <a:off x="762000" y="2590800"/>
-            <a:ext cx="5899546" cy="561975"/>
-          </a:xfrm>
-          <a:prstGeom prst="rect">
-            <a:avLst/>
-          </a:prstGeom>
-          <a:noFill/>
-        </p:spPr>
-        <p:txBody>
-          <a:bodyPr wrap="none" lIns="0" rIns="0" tIns="0" bIns="0" anchor="t">
-            <a:spAutoFit/>
-          </a:bodyPr>
-          <a:lstStyle/>
-          <a:p>
-            <a:pPr algn="l"/>
-            <a:r>
-              <a:rPr b="1" sz="3600" i="0" u="none">
-                <a:solidFill>
-                  <a:srgbClr val="E11D48"/>
-                </a:solidFill>
-                <a:latin typeface="Inter"/>
-              </a:rPr>
-              <a:t>2ª Reclamação</a:t>
-            </a:r>
-          </a:p>
-        </p:txBody>
-      </p:sp>
-      <p:sp>
-        <p:nvSpPr>
-          <p:cNvPr id="9" name="TextBox 8"/>
-          <p:cNvSpPr txBox="1"/>
-          <p:nvPr/>
-        </p:nvSpPr>
-        <p:spPr>
-          <a:xfrm>
-            <a:off x="762000" y="3305175"/>
-            <a:ext cx="4814887" cy="600075"/>
-          </a:xfrm>
-          <a:prstGeom prst="rect">
-            <a:avLst/>
-          </a:prstGeom>
-          <a:noFill/>
-        </p:spPr>
-        <p:txBody>
-          <a:bodyPr wrap="square" lIns="0" rIns="0" tIns="0" bIns="0" anchor="t">
-            <a:spAutoFit/>
-          </a:bodyPr>
-          <a:lstStyle/>
-          <a:p>
-            <a:pPr algn="l"/>
-            <a:r>
-              <a:rPr b="0" sz="1350" i="0" u="none">
-                <a:solidFill>
-                  <a:srgbClr val="475569"/>
-                </a:solidFill>
-                <a:latin typeface="Inter"/>
-              </a:rPr>
-              <a:t>O cliente perdoa o primeiro contato (NPS ~7.8). A necessidade de reabrir o chamado consolida o detrator (NPS ~6.0).</a:t>
-            </a:r>
-          </a:p>
-        </p:txBody>
-      </p:sp>
-      <p:sp>
-        <p:nvSpPr>
-          <p:cNvPr id="10" name="TextBox 9"/>
-          <p:cNvSpPr txBox="1"/>
-          <p:nvPr/>
-        </p:nvSpPr>
-        <p:spPr>
-          <a:xfrm>
-            <a:off x="6710362" y="2590800"/>
-            <a:ext cx="5481637" cy="561975"/>
-          </a:xfrm>
-          <a:prstGeom prst="rect">
-            <a:avLst/>
-          </a:prstGeom>
-          <a:noFill/>
-        </p:spPr>
-        <p:txBody>
-          <a:bodyPr wrap="none" lIns="0" rIns="0" tIns="0" bIns="0" anchor="t">
-            <a:spAutoFit/>
-          </a:bodyPr>
-          <a:lstStyle/>
-          <a:p>
-            <a:pPr algn="l"/>
-            <a:r>
-              <a:rPr b="1" sz="3600" i="0" u="none">
-                <a:solidFill>
-                  <a:srgbClr val="E11D48"/>
-                </a:solidFill>
-                <a:latin typeface="Inter"/>
-              </a:rPr>
-              <a:t>&lt; 7.0 NPS</a:t>
-            </a:r>
-          </a:p>
-        </p:txBody>
-      </p:sp>
-      <p:sp>
-        <p:nvSpPr>
-          <p:cNvPr id="11" name="TextBox 10"/>
-          <p:cNvSpPr txBox="1"/>
-          <p:nvPr/>
-        </p:nvSpPr>
-        <p:spPr>
-          <a:xfrm>
-            <a:off x="6710362" y="3305175"/>
-            <a:ext cx="4814887" cy="600075"/>
-          </a:xfrm>
-          <a:prstGeom prst="rect">
-            <a:avLst/>
-          </a:prstGeom>
-          <a:noFill/>
-        </p:spPr>
-        <p:txBody>
-          <a:bodyPr wrap="square" lIns="0" rIns="0" tIns="0" bIns="0" anchor="t">
-            <a:spAutoFit/>
-          </a:bodyPr>
-          <a:lstStyle/>
-          <a:p>
-            <a:pPr algn="l"/>
-            <a:r>
-              <a:rPr b="0" sz="1350" i="0" u="none">
-                <a:solidFill>
-                  <a:srgbClr val="475569"/>
-                </a:solidFill>
-                <a:latin typeface="Inter"/>
-              </a:rPr>
-              <a:t>Qualquer resolução (mesmo em 0 dias) resulta em nota de detração. O atendimento ágil não salva a falha logística prévia.</a:t>
-            </a:r>
-          </a:p>
-        </p:txBody>
-      </p:sp>
-      <p:sp>
-        <p:nvSpPr>
-          <p:cNvPr id="12" name="TextBox 11"/>
-          <p:cNvSpPr txBox="1"/>
-          <p:nvPr/>
-        </p:nvSpPr>
-        <p:spPr>
-          <a:xfrm>
-            <a:off x="762000" y="1838325"/>
-            <a:ext cx="6194524" cy="276225"/>
-          </a:xfrm>
-          <a:prstGeom prst="rect">
-            <a:avLst/>
-          </a:prstGeom>
-          <a:noFill/>
-        </p:spPr>
-        <p:txBody>
-          <a:bodyPr wrap="none" lIns="0" rIns="0" tIns="0" bIns="0" anchor="t">
-            <a:spAutoFit/>
-          </a:bodyPr>
-          <a:lstStyle/>
-          <a:p>
-            <a:pPr algn="l"/>
-            <a:r>
-              <a:rPr b="1" sz="1800" i="0" u="none">
-                <a:solidFill>
-                  <a:srgbClr val="0F172A"/>
-                </a:solidFill>
-                <a:latin typeface="Inter"/>
-              </a:rPr>
-              <a:t>Atrito Repetitivo</a:t>
-            </a:r>
-          </a:p>
-        </p:txBody>
-      </p:sp>
-      <p:sp>
-        <p:nvSpPr>
-          <p:cNvPr id="13" name="TextBox 12"/>
-          <p:cNvSpPr txBox="1"/>
-          <p:nvPr/>
-        </p:nvSpPr>
-        <p:spPr>
-          <a:xfrm>
-            <a:off x="6710362" y="1838325"/>
-            <a:ext cx="5481637" cy="276225"/>
-          </a:xfrm>
-          <a:prstGeom prst="rect">
-            <a:avLst/>
-          </a:prstGeom>
-          <a:noFill/>
-        </p:spPr>
-        <p:txBody>
-          <a:bodyPr wrap="none" lIns="0" rIns="0" tIns="0" bIns="0" anchor="t">
-            <a:spAutoFit/>
-          </a:bodyPr>
-          <a:lstStyle/>
-          <a:p>
-            <a:pPr algn="l"/>
-            <a:r>
-              <a:rPr b="1" sz="1800" i="0" u="none">
-                <a:solidFill>
-                  <a:srgbClr val="0F172A"/>
-                </a:solidFill>
-                <a:latin typeface="Inter"/>
-              </a:rPr>
-              <a:t>Velocidade de Resolução</a:t>
-            </a:r>
-          </a:p>
-        </p:txBody>
-      </p:sp>
-    </p:spTree>
-  </p:cSld>
-  <p:clrMapOvr>
-    <a:masterClrMapping/>
-  </p:clrMapOvr>
-</p:sld>
+<ns0:sld xmlns:ns0="http://schemas.openxmlformats.org/presentationml/2006/main" xmlns:ns1="http://schemas.openxmlformats.org/drawingml/2006/main">
+  <ns0:cSld>
+    <ns0:bg>
+      <ns0:bgPr>
+        <ns1:solidFill>
+          <ns1:srgbClr val="F8FAFC"/>
+        </ns1:solidFill>
+        <ns1:effectLst/>
+      </ns0:bgPr>
+    </ns0:bg>
+    <ns0:spTree>
+      <ns0:nvGrpSpPr>
+        <ns0:cNvPr id="1" name=""/>
+        <ns0:cNvGrpSpPr/>
+        <ns0:nvPr/>
+      </ns0:nvGrpSpPr>
+      <ns0:grpSpPr/>
+      <ns0:sp>
+        <ns0:nvSpPr>
+          <ns0:cNvPr id="2" name="Rectangle 1"/>
+          <ns0:cNvSpPr/>
+          <ns0:nvPr/>
+        </ns0:nvSpPr>
+        <ns0:spPr>
+          <ns1:xfrm>
+            <ns1:off x="6091237" y="1838325"/>
+            <ns1:ext cx="9525" cy="4257675"/>
+          </ns1:xfrm>
+          <ns1:prstGeom prst="rect">
+            <ns1:avLst/>
+          </ns1:prstGeom>
+          <ns1:solidFill>
+            <ns1:srgbClr val="CBD5E1"/>
+          </ns1:solidFill>
+          <ns1:ln>
+            <ns1:noFill/>
+          </ns1:ln>
+          <ns1:effectLst/>
+        </ns0:spPr>
+        <ns0:style>
+          <ns1:lnRef idx="1">
+            <ns1:schemeClr val="accent1"/>
+          </ns1:lnRef>
+          <ns1:fillRef idx="3">
+            <ns1:schemeClr val="accent1"/>
+          </ns1:fillRef>
+          <ns1:effectRef idx="2">
+            <ns1:schemeClr val="accent1"/>
+          </ns1:effectRef>
+          <ns1:fontRef idx="minor">
+            <ns1:schemeClr val="lt1"/>
+          </ns1:fontRef>
+        </ns0:style>
+        <ns0:txBody>
+          <ns1:bodyPr rtlCol="0" anchor="ctr"/>
+          <ns1:lstStyle/>
+          <ns1:p>
+            <ns1:pPr algn="ctr"/>
+          </ns1:p>
+        </ns0:txBody>
+      </ns0:sp>
+      <ns0:sp>
+        <ns0:nvSpPr>
+          <ns0:cNvPr id="3" name="Rectangle 2"/>
+          <ns0:cNvSpPr/>
+          <ns0:nvPr/>
+        </ns0:nvSpPr>
+        <ns0:spPr>
+          <ns1:xfrm>
+            <ns1:off x="762000" y="1838325"/>
+            <ns1:ext cx="4719637" cy="447675"/>
+          </ns1:xfrm>
+          <ns1:prstGeom prst="rect">
+            <ns1:avLst/>
+          </ns1:prstGeom>
+          <ns1:noFill/>
+          <ns1:ln>
+            <ns1:noFill/>
+          </ns1:ln>
+          <ns1:effectLst/>
+        </ns0:spPr>
+        <ns0:style>
+          <ns1:lnRef idx="1">
+            <ns1:schemeClr val="accent1"/>
+          </ns1:lnRef>
+          <ns1:fillRef idx="3">
+            <ns1:schemeClr val="accent1"/>
+          </ns1:fillRef>
+          <ns1:effectRef idx="2">
+            <ns1:schemeClr val="accent1"/>
+          </ns1:effectRef>
+          <ns1:fontRef idx="minor">
+            <ns1:schemeClr val="lt1"/>
+          </ns1:fontRef>
+        </ns0:style>
+        <ns0:txBody>
+          <ns1:bodyPr rtlCol="0" anchor="ctr"/>
+          <ns1:lstStyle/>
+          <ns1:p>
+            <ns1:pPr algn="ctr"/>
+          </ns1:p>
+        </ns0:txBody>
+      </ns0:sp>
+      <ns0:sp>
+        <ns0:nvSpPr>
+          <ns0:cNvPr id="4" name="Rectangle 3"/>
+          <ns0:cNvSpPr/>
+          <ns0:nvPr/>
+        </ns0:nvSpPr>
+        <ns0:spPr>
+          <ns1:xfrm>
+            <ns1:off x="6710362" y="1838325"/>
+            <ns1:ext cx="4719637" cy="447675"/>
+          </ns1:xfrm>
+          <ns1:prstGeom prst="rect">
+            <ns1:avLst/>
+          </ns1:prstGeom>
+          <ns1:noFill/>
+          <ns1:ln>
+            <ns1:noFill/>
+          </ns1:ln>
+          <ns1:effectLst/>
+        </ns0:spPr>
+        <ns0:style>
+          <ns1:lnRef idx="1">
+            <ns1:schemeClr val="accent1"/>
+          </ns1:lnRef>
+          <ns1:fillRef idx="3">
+            <ns1:schemeClr val="accent1"/>
+          </ns1:fillRef>
+          <ns1:effectRef idx="2">
+            <ns1:schemeClr val="accent1"/>
+          </ns1:effectRef>
+          <ns1:fontRef idx="minor">
+            <ns1:schemeClr val="lt1"/>
+          </ns1:fontRef>
+        </ns0:style>
+        <ns0:txBody>
+          <ns1:bodyPr rtlCol="0" anchor="ctr"/>
+          <ns1:lstStyle/>
+          <ns1:p>
+            <ns1:pPr algn="ctr"/>
+          </ns1:p>
+        </ns0:txBody>
+      </ns0:sp>
+      <ns0:sp>
+        <ns0:nvSpPr>
+          <ns0:cNvPr id="5" name="Rectangle 4"/>
+          <ns0:cNvSpPr/>
+          <ns0:nvPr/>
+        </ns0:nvSpPr>
+        <ns0:spPr>
+          <ns1:xfrm>
+            <ns1:off x="762000" y="2266950"/>
+            <ns1:ext cx="4719637" cy="19050"/>
+          </ns1:xfrm>
+          <ns1:prstGeom prst="rect">
+            <ns1:avLst/>
+          </ns1:prstGeom>
+          <ns1:solidFill>
+            <ns1:srgbClr val="E2E8F0"/>
+          </ns1:solidFill>
+          <ns1:ln>
+            <ns1:noFill/>
+          </ns1:ln>
+          <ns1:effectLst/>
+        </ns0:spPr>
+        <ns0:style>
+          <ns1:lnRef idx="1">
+            <ns1:schemeClr val="accent1"/>
+          </ns1:lnRef>
+          <ns1:fillRef idx="3">
+            <ns1:schemeClr val="accent1"/>
+          </ns1:fillRef>
+          <ns1:effectRef idx="2">
+            <ns1:schemeClr val="accent1"/>
+          </ns1:effectRef>
+          <ns1:fontRef idx="minor">
+            <ns1:schemeClr val="lt1"/>
+          </ns1:fontRef>
+        </ns0:style>
+        <ns0:txBody>
+          <ns1:bodyPr rtlCol="0" anchor="ctr"/>
+          <ns1:lstStyle/>
+          <ns1:p>
+            <ns1:pPr algn="ctr"/>
+          </ns1:p>
+        </ns0:txBody>
+      </ns0:sp>
+      <ns0:sp>
+        <ns0:nvSpPr>
+          <ns0:cNvPr id="6" name="Rectangle 5"/>
+          <ns0:cNvSpPr/>
+          <ns0:nvPr/>
+        </ns0:nvSpPr>
+        <ns0:spPr>
+          <ns1:xfrm>
+            <ns1:off x="6710362" y="2266950"/>
+            <ns1:ext cx="4719637" cy="19050"/>
+          </ns1:xfrm>
+          <ns1:prstGeom prst="rect">
+            <ns1:avLst/>
+          </ns1:prstGeom>
+          <ns1:solidFill>
+            <ns1:srgbClr val="E2E8F0"/>
+          </ns1:solidFill>
+          <ns1:ln>
+            <ns1:noFill/>
+          </ns1:ln>
+          <ns1:effectLst/>
+        </ns0:spPr>
+        <ns0:style>
+          <ns1:lnRef idx="1">
+            <ns1:schemeClr val="accent1"/>
+          </ns1:lnRef>
+          <ns1:fillRef idx="3">
+            <ns1:schemeClr val="accent1"/>
+          </ns1:fillRef>
+          <ns1:effectRef idx="2">
+            <ns1:schemeClr val="accent1"/>
+          </ns1:effectRef>
+          <ns1:fontRef idx="minor">
+            <ns1:schemeClr val="lt1"/>
+          </ns1:fontRef>
+        </ns0:style>
+        <ns0:txBody>
+          <ns1:bodyPr rtlCol="0" anchor="ctr"/>
+          <ns1:lstStyle/>
+          <ns1:p>
+            <ns1:pPr algn="ctr"/>
+          </ns1:p>
+        </ns0:txBody>
+      </ns0:sp>
+      <ns0:sp>
+        <ns0:nvSpPr>
+          <ns0:cNvPr id="7" name="TextBox 6"/>
+          <ns0:cNvSpPr txBox="1"/>
+          <ns0:nvPr/>
+        </ns0:nvSpPr>
+        <ns0:spPr>
+          <ns1:xfrm>
+            <ns1:off x="762000" y="762000"/>
+            <ns1:ext cx="11430000" cy="466725"/>
+          </ns1:xfrm>
+          <ns1:prstGeom prst="rect">
+            <ns1:avLst/>
+          </ns1:prstGeom>
+          <ns1:noFill/>
+        </ns0:spPr>
+        <ns0:txBody>
+          <ns1:bodyPr wrap="none" lIns="0" rIns="0" tIns="0" bIns="0" anchor="t">
+            <ns1:spAutoFit/>
+          </ns1:bodyPr>
+          <ns1:lstStyle/>
+          <ns1:p>
+            <ns1:pPr algn="l"/>
+            <ns1:r>
+              <ns1:rPr b="1" sz="3000" i="0" u="none">
+                <ns1:solidFill>
+                  <ns1:srgbClr val="0F172A"/>
+                </ns1:solidFill>
+                <ns1:latin typeface="Inter"/>
+              </ns1:rPr>
+              <ns1:t>Reclamações e resolução</ns1:t>
+            </ns1:r>
+          </ns1:p>
+        </ns0:txBody>
+      </ns0:sp>
+      <ns0:sp>
+        <ns0:nvSpPr>
+          <ns0:cNvPr id="8" name="TextBox 7"/>
+          <ns0:cNvSpPr txBox="1"/>
+          <ns0:nvPr/>
+        </ns0:nvSpPr>
+        <ns0:spPr>
+          <ns1:xfrm>
+            <ns1:off x="762000" y="2590800"/>
+            <ns1:ext cx="5899546" cy="561975"/>
+          </ns1:xfrm>
+          <ns1:prstGeom prst="rect">
+            <ns1:avLst/>
+          </ns1:prstGeom>
+          <ns1:noFill/>
+        </ns0:spPr>
+        <ns0:txBody>
+          <ns1:bodyPr wrap="none" lIns="0" rIns="0" tIns="0" bIns="0" anchor="t">
+            <ns1:spAutoFit/>
+          </ns1:bodyPr>
+          <ns1:lstStyle/>
+          <ns1:p>
+            <ns1:pPr algn="l"/>
+            <ns1:r>
+              <ns1:rPr b="1" sz="3600" i="0" u="none">
+                <ns1:solidFill>
+                  <ns1:srgbClr val="E11D48"/>
+                </ns1:solidFill>
+                <ns1:latin typeface="Inter"/>
+              </ns1:rPr>
+              <ns1:t>Volume de reclamações</ns1:t>
+            </ns1:r>
+          </ns1:p>
+        </ns0:txBody>
+      </ns0:sp>
+      <ns0:sp>
+        <ns0:nvSpPr>
+          <ns0:cNvPr id="9" name="TextBox 8"/>
+          <ns0:cNvSpPr txBox="1"/>
+          <ns0:nvPr/>
+        </ns0:nvSpPr>
+        <ns0:spPr>
+          <ns1:xfrm>
+            <ns1:off x="762000" y="3305175"/>
+            <ns1:ext cx="4814887" cy="600075"/>
+          </ns1:xfrm>
+          <ns1:prstGeom prst="rect">
+            <ns1:avLst/>
+          </ns1:prstGeom>
+          <ns1:noFill/>
+        </ns0:spPr>
+        <ns0:txBody>
+          <ns1:bodyPr wrap="square" lIns="0" rIns="0" tIns="0" bIns="0" anchor="t">
+            <ns1:spAutoFit/>
+          </ns1:bodyPr>
+          <ns1:lstStyle/>
+          <ns1:p>
+            <ns1:pPr algn="l"/>
+            <ns1:r>
+              <ns1:rPr b="0" sz="1350" i="0" u="none">
+                <ns1:solidFill>
+                  <ns1:srgbClr val="475569"/>
+                </ns1:solidFill>
+                <ns1:latin typeface="Inter"/>
+              </ns1:rPr>
+              <ns1:t>NPS médio: 8,52 (0); 7,77 (1); 6,05 (2); 4,91 (3). Grupo sem reclamação: n=23.</ns1:t>
+            </ns1:r>
+          </ns1:p>
+        </ns0:txBody>
+      </ns0:sp>
+      <ns0:sp>
+        <ns0:nvSpPr>
+          <ns0:cNvPr id="10" name="TextBox 9"/>
+          <ns0:cNvSpPr txBox="1"/>
+          <ns0:nvPr/>
+        </ns0:nvSpPr>
+        <ns0:spPr>
+          <ns1:xfrm>
+            <ns1:off x="6710362" y="2590800"/>
+            <ns1:ext cx="5481637" cy="561975"/>
+          </ns1:xfrm>
+          <ns1:prstGeom prst="rect">
+            <ns1:avLst/>
+          </ns1:prstGeom>
+          <ns1:noFill/>
+        </ns0:spPr>
+        <ns0:txBody>
+          <ns1:bodyPr wrap="none" lIns="0" rIns="0" tIns="0" bIns="0" anchor="t">
+            <ns1:spAutoFit/>
+          </ns1:bodyPr>
+          <ns1:lstStyle/>
+          <ns1:p>
+            <ns1:pPr algn="l"/>
+            <ns1:r>
+              <ns1:rPr b="1" sz="3600" i="0" u="none">
+                <ns1:solidFill>
+                  <ns1:srgbClr val="E11D48"/>
+                </ns1:solidFill>
+                <ns1:latin typeface="Inter"/>
+              </ns1:rPr>
+              <ns1:t>Tempo de resolução</ns1:t>
+            </ns1:r>
+          </ns1:p>
+        </ns0:txBody>
+      </ns0:sp>
+      <ns0:sp>
+        <ns0:nvSpPr>
+          <ns0:cNvPr id="11" name="TextBox 10"/>
+          <ns0:cNvSpPr txBox="1"/>
+          <ns0:nvPr/>
+        </ns0:nvSpPr>
+        <ns0:spPr>
+          <ns1:xfrm>
+            <ns1:off x="6710362" y="3305175"/>
+            <ns1:ext cx="4814887" cy="600075"/>
+          </ns1:xfrm>
+          <ns1:prstGeom prst="rect">
+            <ns1:avLst/>
+          </ns1:prstGeom>
+          <ns1:noFill/>
+        </ns0:spPr>
+        <ns0:txBody>
+          <ns1:bodyPr wrap="square" lIns="0" rIns="0" tIns="0" bIns="0" anchor="t">
+            <ns1:spAutoFit/>
+          </ns1:bodyPr>
+          <ns1:lstStyle/>
+          <ns1:p>
+            <ns1:pPr algn="l"/>
+            <ns1:r>
+              <ns1:rPr b="0" sz="1350" i="0" u="none">
+                <ns1:solidFill>
+                  <ns1:srgbClr val="475569"/>
+                </ns1:solidFill>
+                <ns1:latin typeface="Inter"/>
+              </ns1:rPr>
+              <ns1:t>NPS médio: 5,3 (0 dias) e 3,7 (&gt;10 dias), em grupos de n=208 e n=214. Padrão da amostra; não prova causa.</ns1:t>
+            </ns1:r>
+          </ns1:p>
+        </ns0:txBody>
+      </ns0:sp>
+      <ns0:sp>
+        <ns0:nvSpPr>
+          <ns0:cNvPr id="12" name="TextBox 11"/>
+          <ns0:cNvSpPr txBox="1"/>
+          <ns0:nvPr/>
+        </ns0:nvSpPr>
+        <ns0:spPr>
+          <ns1:xfrm>
+            <ns1:off x="762000" y="1838325"/>
+            <ns1:ext cx="6194524" cy="276225"/>
+          </ns1:xfrm>
+          <ns1:prstGeom prst="rect">
+            <ns1:avLst/>
+          </ns1:prstGeom>
+          <ns1:noFill/>
+        </ns0:spPr>
+        <ns0:txBody>
+          <ns1:bodyPr wrap="none" lIns="0" rIns="0" tIns="0" bIns="0" anchor="t">
+            <ns1:spAutoFit/>
+          </ns1:bodyPr>
+          <ns1:lstStyle/>
+          <ns1:p>
+            <ns1:pPr algn="l"/>
+            <ns1:r>
+              <ns1:rPr b="1" sz="1800" i="0" u="none">
+                <ns1:solidFill>
+                  <ns1:srgbClr val="0F172A"/>
+                </ns1:solidFill>
+                <ns1:latin typeface="Inter"/>
+              </ns1:rPr>
+              <ns1:t>Sinal para investigar</ns1:t>
+            </ns1:r>
+          </ns1:p>
+        </ns0:txBody>
+      </ns0:sp>
+      <ns0:sp>
+        <ns0:nvSpPr>
+          <ns0:cNvPr id="13" name="TextBox 12"/>
+          <ns0:cNvSpPr txBox="1"/>
+          <ns0:nvPr/>
+        </ns0:nvSpPr>
+        <ns0:spPr>
+          <ns1:xfrm>
+            <ns1:off x="6710362" y="1838325"/>
+            <ns1:ext cx="5481637" cy="276225"/>
+          </ns1:xfrm>
+          <ns1:prstGeom prst="rect">
+            <ns1:avLst/>
+          </ns1:prstGeom>
+          <ns1:noFill/>
+        </ns0:spPr>
+        <ns0:txBody>
+          <ns1:bodyPr wrap="none" lIns="0" rIns="0" tIns="0" bIns="0" anchor="t">
+            <ns1:spAutoFit/>
+          </ns1:bodyPr>
+          <ns1:lstStyle/>
+          <ns1:p>
+            <ns1:pPr algn="l"/>
+            <ns1:r>
+              <ns1:rPr b="1" sz="1800" i="0" u="none">
+                <ns1:solidFill>
+                  <ns1:srgbClr val="0F172A"/>
+                </ns1:solidFill>
+                <ns1:latin typeface="Inter"/>
+              </ns1:rPr>
+              <ns1:t>Reclamações e tempo de resolução</ns1:t>
+            </ns1:r>
+          </ns1:p>
+        </ns0:txBody>
+      </ns0:sp>
+    </ns0:spTree>
+  </ns0:cSld>
+  <ns0:clrMapOvr>
+    <ns1:masterClrMapping/>
+  </ns0:clrMapOvr>
+</ns0:sld>
 </file>
 
 <file path=ppt/slides/slide7.xml><?xml version="1.0" encoding="utf-8"?>
-<p:sld xmlns:a="http://schemas.openxmlformats.org/drawingml/2006/main" xmlns:p="http://schemas.openxmlformats.org/presentationml/2006/main" xmlns:r="http://schemas.openxmlformats.org/officeDocument/2006/relationships">
-  <p:cSld>
-    <p:bg>
-      <p:bgPr>
-        <a:solidFill>
-          <a:srgbClr val="FFFFFF"/>
-        </a:solidFill>
-        <a:effectLst/>
-      </p:bgPr>
-    </p:bg>
-    <p:spTree>
-      <p:nvGrpSpPr>
-        <p:cNvPr id="1" name=""/>
-        <p:cNvGrpSpPr/>
-        <p:nvPr/>
-      </p:nvGrpSpPr>
-      <p:grpSpPr/>
-      <p:sp>
-        <p:nvSpPr>
-          <p:cNvPr id="2" name="Rounded Rectangle 1"/>
-          <p:cNvSpPr/>
-          <p:nvPr/>
-        </p:nvSpPr>
-        <p:spPr>
-          <a:xfrm>
-            <a:off x="2857500" y="4372867"/>
-            <a:ext cx="6477000" cy="685800"/>
-          </a:xfrm>
-          <a:prstGeom prst="roundRect">
-            <a:avLst>
-              <a:gd name="adj" fmla="val 11111"/>
-            </a:avLst>
-          </a:prstGeom>
-          <a:solidFill>
-            <a:srgbClr val="F1F5F9"/>
-          </a:solidFill>
-          <a:ln>
-            <a:noFill/>
-          </a:ln>
-          <a:effectLst/>
-        </p:spPr>
-        <p:style>
-          <a:lnRef idx="1">
-            <a:schemeClr val="accent1"/>
-          </a:lnRef>
-          <a:fillRef idx="3">
-            <a:schemeClr val="accent1"/>
-          </a:fillRef>
-          <a:effectRef idx="2">
-            <a:schemeClr val="accent1"/>
-          </a:effectRef>
-          <a:fontRef idx="minor">
-            <a:schemeClr val="lt1"/>
-          </a:fontRef>
-        </p:style>
-        <p:txBody>
-          <a:bodyPr rtlCol="0" anchor="ctr"/>
-          <a:lstStyle/>
-          <a:p>
-            <a:pPr algn="ctr"/>
-          </a:p>
-        </p:txBody>
-      </p:sp>
-      <p:pic>
-        <p:nvPicPr>
-          <p:cNvPr id="3" name="Picture 2" descr="image.png"/>
-          <p:cNvPicPr>
-            <a:picLocks noChangeAspect="1"/>
-          </p:cNvPicPr>
-          <p:nvPr/>
-        </p:nvPicPr>
-        <p:blipFill>
-          <a:blip r:embed="rId2"/>
-          <a:stretch>
-            <a:fillRect/>
-          </a:stretch>
-        </p:blipFill>
-        <p:spPr>
-          <a:xfrm>
-            <a:off x="5810250" y="1799332"/>
-            <a:ext cx="571500" cy="457200"/>
-          </a:xfrm>
-          <a:prstGeom prst="rect">
-            <a:avLst/>
-          </a:prstGeom>
-        </p:spPr>
-      </p:pic>
-      <p:sp>
-        <p:nvSpPr>
-          <p:cNvPr id="4" name="TextBox 3"/>
-          <p:cNvSpPr txBox="1"/>
-          <p:nvPr/>
-        </p:nvSpPr>
-        <p:spPr>
-          <a:xfrm>
-            <a:off x="3114377" y="2561332"/>
-            <a:ext cx="5963245" cy="561975"/>
-          </a:xfrm>
-          <a:prstGeom prst="rect">
-            <a:avLst/>
-          </a:prstGeom>
-          <a:noFill/>
-        </p:spPr>
-        <p:txBody>
-          <a:bodyPr wrap="none" lIns="0" rIns="0" tIns="0" bIns="0" anchor="t">
-            <a:spAutoFit/>
-          </a:bodyPr>
-          <a:lstStyle/>
-          <a:p>
-            <a:pPr algn="ctr"/>
-            <a:r>
-              <a:rPr b="1" sz="3600" i="0" u="none">
-                <a:solidFill>
-                  <a:srgbClr val="0F172A"/>
-                </a:solidFill>
-                <a:latin typeface="Inter"/>
-              </a:rPr>
-              <a:t>O Mito Demográfico</a:t>
-            </a:r>
-          </a:p>
-        </p:txBody>
-      </p:sp>
-      <p:sp>
-        <p:nvSpPr>
-          <p:cNvPr id="5" name="TextBox 4"/>
-          <p:cNvSpPr txBox="1"/>
-          <p:nvPr/>
-        </p:nvSpPr>
-        <p:spPr>
-          <a:xfrm>
-            <a:off x="1928812" y="3351907"/>
-            <a:ext cx="8334375" cy="639960"/>
-          </a:xfrm>
-          <a:prstGeom prst="rect">
-            <a:avLst/>
-          </a:prstGeom>
-          <a:noFill/>
-        </p:spPr>
-        <p:txBody>
-          <a:bodyPr wrap="square" lIns="0" rIns="0" tIns="0" bIns="0" anchor="t">
-            <a:spAutoFit/>
-          </a:bodyPr>
-          <a:lstStyle/>
-          <a:p>
-            <a:pPr algn="ctr">
-              <a:lnSpc>
-                <a:spcPts val="2520"/>
-              </a:lnSpc>
-            </a:pPr>
-            <a:r>
-              <a:rPr b="0" sz="1800" i="0" u="none">
-                <a:solidFill>
-                  <a:srgbClr val="475569"/>
-                </a:solidFill>
-                <a:latin typeface="Inter"/>
-              </a:rPr>
-              <a:t>Idade, região e tempo de fidelidade não alteram o NPS. A insatisfação é idêntica em todos os segmentos.</a:t>
-            </a:r>
-          </a:p>
-        </p:txBody>
-      </p:sp>
-      <p:sp>
-        <p:nvSpPr>
-          <p:cNvPr id="6" name="TextBox 5"/>
-          <p:cNvSpPr txBox="1"/>
-          <p:nvPr/>
-        </p:nvSpPr>
-        <p:spPr>
-          <a:xfrm>
-            <a:off x="2619375" y="4601467"/>
-            <a:ext cx="6953250" cy="228600"/>
-          </a:xfrm>
-          <a:prstGeom prst="rect">
-            <a:avLst/>
-          </a:prstGeom>
-          <a:noFill/>
-        </p:spPr>
-        <p:txBody>
-          <a:bodyPr wrap="none" lIns="0" rIns="0" tIns="0" bIns="0" anchor="t">
-            <a:spAutoFit/>
-          </a:bodyPr>
-          <a:lstStyle/>
-          <a:p>
-            <a:pPr algn="ctr"/>
-            <a:r>
-              <a:rPr b="1" sz="1500" i="0" u="none">
-                <a:solidFill>
-                  <a:srgbClr val="0F172A"/>
-                </a:solidFill>
-                <a:latin typeface="Inter"/>
-              </a:rPr>
-              <a:t>Insight: O problema é estritamente operacional e transversal.</a:t>
-            </a:r>
-          </a:p>
-        </p:txBody>
-      </p:sp>
-    </p:spTree>
-  </p:cSld>
-  <p:clrMapOvr>
-    <a:masterClrMapping/>
-  </p:clrMapOvr>
-</p:sld>
+<ns0:sld xmlns:ns0="http://schemas.openxmlformats.org/presentationml/2006/main" xmlns:ns1="http://schemas.openxmlformats.org/drawingml/2006/main" xmlns:ns2="http://schemas.openxmlformats.org/officeDocument/2006/relationships">
+  <ns0:cSld>
+    <ns0:bg>
+      <ns0:bgPr>
+        <ns1:solidFill>
+          <ns1:srgbClr val="FFFFFF"/>
+        </ns1:solidFill>
+        <ns1:effectLst/>
+      </ns0:bgPr>
+    </ns0:bg>
+    <ns0:spTree>
+      <ns0:nvGrpSpPr>
+        <ns0:cNvPr id="1" name=""/>
+        <ns0:cNvGrpSpPr/>
+        <ns0:nvPr/>
+      </ns0:nvGrpSpPr>
+      <ns0:grpSpPr/>
+      <ns0:sp>
+        <ns0:nvSpPr>
+          <ns0:cNvPr id="2" name="Rounded Rectangle 1"/>
+          <ns0:cNvSpPr/>
+          <ns0:nvPr/>
+        </ns0:nvSpPr>
+        <ns0:spPr>
+          <ns1:xfrm>
+            <ns1:off x="2857500" y="4372867"/>
+            <ns1:ext cx="6477000" cy="685800"/>
+          </ns1:xfrm>
+          <ns1:prstGeom prst="roundRect">
+            <ns1:avLst>
+              <ns1:gd name="adj" fmla="val 11111"/>
+            </ns1:avLst>
+          </ns1:prstGeom>
+          <ns1:solidFill>
+            <ns1:srgbClr val="F1F5F9"/>
+          </ns1:solidFill>
+          <ns1:ln>
+            <ns1:noFill/>
+          </ns1:ln>
+          <ns1:effectLst/>
+        </ns0:spPr>
+        <ns0:style>
+          <ns1:lnRef idx="1">
+            <ns1:schemeClr val="accent1"/>
+          </ns1:lnRef>
+          <ns1:fillRef idx="3">
+            <ns1:schemeClr val="accent1"/>
+          </ns1:fillRef>
+          <ns1:effectRef idx="2">
+            <ns1:schemeClr val="accent1"/>
+          </ns1:effectRef>
+          <ns1:fontRef idx="minor">
+            <ns1:schemeClr val="lt1"/>
+          </ns1:fontRef>
+        </ns0:style>
+        <ns0:txBody>
+          <ns1:bodyPr rtlCol="0" anchor="ctr"/>
+          <ns1:lstStyle/>
+          <ns1:p>
+            <ns1:pPr algn="ctr"/>
+          </ns1:p>
+        </ns0:txBody>
+      </ns0:sp>
+      <ns0:pic>
+        <ns0:nvPicPr>
+          <ns0:cNvPr id="3" name="Picture 2" descr="image.png"/>
+          <ns0:cNvPicPr>
+            <ns1:picLocks noChangeAspect="1"/>
+          </ns0:cNvPicPr>
+          <ns0:nvPr/>
+        </ns0:nvPicPr>
+        <ns0:blipFill>
+          <ns1:blip ns2:embed="rId2"/>
+          <ns1:stretch>
+            <ns1:fillRect/>
+          </ns1:stretch>
+        </ns0:blipFill>
+        <ns0:spPr>
+          <ns1:xfrm>
+            <ns1:off x="5810250" y="1799332"/>
+            <ns1:ext cx="571500" cy="457200"/>
+          </ns1:xfrm>
+          <ns1:prstGeom prst="rect">
+            <ns1:avLst/>
+          </ns1:prstGeom>
+        </ns0:spPr>
+      </ns0:pic>
+      <ns0:sp>
+        <ns0:nvSpPr>
+          <ns0:cNvPr id="4" name="TextBox 3"/>
+          <ns0:cNvSpPr txBox="1"/>
+          <ns0:nvPr/>
+        </ns0:nvSpPr>
+        <ns0:spPr>
+          <ns1:xfrm>
+            <ns1:off x="3114377" y="2561332"/>
+            <ns1:ext cx="5963245" cy="561975"/>
+          </ns1:xfrm>
+          <ns1:prstGeom prst="rect">
+            <ns1:avLst/>
+          </ns1:prstGeom>
+          <ns1:noFill/>
+        </ns0:spPr>
+        <ns0:txBody>
+          <ns1:bodyPr wrap="none" lIns="0" rIns="0" tIns="0" bIns="0" anchor="t">
+            <ns1:spAutoFit/>
+          </ns1:bodyPr>
+          <ns1:lstStyle/>
+          <ns1:p>
+            <ns1:pPr algn="ctr"/>
+            <ns1:r>
+              <ns1:rPr b="1" sz="3600" i="0" u="none">
+                <ns1:solidFill>
+                  <ns1:srgbClr val="0F172A"/>
+                </ns1:solidFill>
+                <ns1:latin typeface="Inter"/>
+              </ns1:rPr>
+              <ns1:t>Diferenças por perfil não são claras</ns1:t>
+            </ns1:r>
+          </ns1:p>
+        </ns0:txBody>
+      </ns0:sp>
+      <ns0:sp>
+        <ns0:nvSpPr>
+          <ns0:cNvPr id="5" name="TextBox 4"/>
+          <ns0:cNvSpPr txBox="1"/>
+          <ns0:nvPr/>
+        </ns0:nvSpPr>
+        <ns0:spPr>
+          <ns1:xfrm>
+            <ns1:off x="1928812" y="3351907"/>
+            <ns1:ext cx="8334375" cy="639960"/>
+          </ns1:xfrm>
+          <ns1:prstGeom prst="rect">
+            <ns1:avLst/>
+          </ns1:prstGeom>
+          <ns1:noFill/>
+        </ns0:spPr>
+        <ns0:txBody>
+          <ns1:bodyPr wrap="square" lIns="0" rIns="0" tIns="0" bIns="0" anchor="t">
+            <ns1:spAutoFit/>
+          </ns1:bodyPr>
+          <ns1:lstStyle/>
+          <ns1:p>
+            <ns1:pPr algn="ctr">
+              <ns1:lnSpc>
+                <ns1:spcPts val="2520"/>
+              </ns1:lnSpc>
+            </ns1:pPr>
+            <ns1:r>
+              <ns1:rPr b="0" sz="1800" i="0" u="none">
+                <ns1:solidFill>
+                  <ns1:srgbClr val="475569"/>
+                </ns1:solidFill>
+                <ns1:latin typeface="Inter"/>
+              </ns1:rPr>
+              <ns1:t>Kruskal–Wallis: região p=0,497; relacionamento p=0,189; idade p=0,058.</ns1:t>
+            </ns1:r>
+          </ns1:p>
+        </ns0:txBody>
+      </ns0:sp>
+      <ns0:sp>
+        <ns0:nvSpPr>
+          <ns0:cNvPr id="6" name="TextBox 5"/>
+          <ns0:cNvSpPr txBox="1"/>
+          <ns0:nvPr/>
+        </ns0:nvSpPr>
+        <ns0:spPr>
+          <ns1:xfrm>
+            <ns1:off x="2619375" y="4601467"/>
+            <ns1:ext cx="6953250" cy="228600"/>
+          </ns1:xfrm>
+          <ns1:prstGeom prst="rect">
+            <ns1:avLst/>
+          </ns1:prstGeom>
+          <ns1:noFill/>
+        </ns0:spPr>
+        <ns0:txBody>
+          <ns1:bodyPr wrap="none" lIns="0" rIns="0" tIns="0" bIns="0" anchor="t">
+            <ns1:spAutoFit/>
+          </ns1:bodyPr>
+          <ns1:lstStyle/>
+          <ns1:p>
+            <ns1:pPr algn="ctr"/>
+            <ns1:r>
+              <ns1:rPr b="1" sz="1500" i="0" u="none">
+                <ns1:solidFill>
+                  <ns1:srgbClr val="0F172A"/>
+                </ns1:solidFill>
+                <ns1:latin typeface="Inter"/>
+              </ns1:rPr>
+              <ns1:t>Sem evidência a 5% não significa que os segmentos sejam equivalentes.</ns1:t>
+            </ns1:r>
+          </ns1:p>
+        </ns0:txBody>
+      </ns0:sp>
+    </ns0:spTree>
+  </ns0:cSld>
+  <ns0:clrMapOvr>
+    <ns1:masterClrMapping/>
+  </ns0:clrMapOvr>
+</ns0:sld>
 </file>
 
 <file path=ppt/slides/slide8.xml><?xml version="1.0" encoding="utf-8"?>
-<p:sld xmlns:a="http://schemas.openxmlformats.org/drawingml/2006/main" xmlns:p="http://schemas.openxmlformats.org/presentationml/2006/main" xmlns:r="http://schemas.openxmlformats.org/officeDocument/2006/relationships">
-  <p:cSld>
-    <p:bg>
-      <p:bgPr>
-        <a:solidFill>
-          <a:srgbClr val="F8FAFC"/>
-        </a:solidFill>
-        <a:effectLst/>
-      </p:bgPr>
-    </p:bg>
-    <p:spTree>
-      <p:nvGrpSpPr>
-        <p:cNvPr id="1" name=""/>
-        <p:cNvGrpSpPr/>
-        <p:nvPr/>
-      </p:nvGrpSpPr>
-      <p:grpSpPr/>
-      <p:sp>
-        <p:nvSpPr>
-          <p:cNvPr id="2" name="TextBox 1"/>
-          <p:cNvSpPr txBox="1"/>
-          <p:nvPr/>
-        </p:nvSpPr>
-        <p:spPr>
-          <a:xfrm>
-            <a:off x="762000" y="762000"/>
-            <a:ext cx="11430000" cy="466725"/>
-          </a:xfrm>
-          <a:prstGeom prst="rect">
-            <a:avLst/>
-          </a:prstGeom>
-          <a:noFill/>
-        </p:spPr>
-        <p:txBody>
-          <a:bodyPr wrap="none" lIns="0" rIns="0" tIns="0" bIns="0" anchor="t">
-            <a:spAutoFit/>
-          </a:bodyPr>
-          <a:lstStyle/>
-          <a:p>
-            <a:pPr algn="l"/>
-            <a:r>
-              <a:rPr b="1" sz="3000" i="0" u="none">
-                <a:solidFill>
-                  <a:srgbClr val="0F172A"/>
-                </a:solidFill>
-                <a:latin typeface="Inter"/>
-              </a:rPr>
-              <a:t>O Futuro: Modelo Preditivo</a:t>
-            </a:r>
-          </a:p>
-        </p:txBody>
-      </p:sp>
-      <p:sp>
-        <p:nvSpPr>
-          <p:cNvPr id="3" name="TextBox 2"/>
-          <p:cNvSpPr txBox="1"/>
-          <p:nvPr/>
-        </p:nvSpPr>
-        <p:spPr>
-          <a:xfrm>
-            <a:off x="762000" y="1381125"/>
-            <a:ext cx="11430000" cy="228600"/>
-          </a:xfrm>
-          <a:prstGeom prst="rect">
-            <a:avLst/>
-          </a:prstGeom>
-          <a:noFill/>
-        </p:spPr>
-        <p:txBody>
-          <a:bodyPr wrap="none" lIns="0" rIns="0" tIns="0" bIns="0" anchor="t">
-            <a:spAutoFit/>
-          </a:bodyPr>
-          <a:lstStyle/>
-          <a:p>
-            <a:pPr algn="l"/>
-            <a:r>
-              <a:rPr b="0" sz="1500" i="0" u="none">
-                <a:solidFill>
-                  <a:srgbClr val="64748B"/>
-                </a:solidFill>
-                <a:latin typeface="Inter"/>
-              </a:rPr>
-              <a:t>Atuação proativa baseada em Machine Learning.</a:t>
-            </a:r>
-          </a:p>
-        </p:txBody>
-      </p:sp>
-      <p:sp>
-        <p:nvSpPr>
-          <p:cNvPr id="4" name="Rectangle 3"/>
-          <p:cNvSpPr/>
-          <p:nvPr/>
-        </p:nvSpPr>
-        <p:spPr>
-          <a:xfrm>
-            <a:off x="762000" y="2447925"/>
-            <a:ext cx="10668000" cy="38100"/>
-          </a:xfrm>
-          <a:prstGeom prst="rect">
-            <a:avLst/>
-          </a:prstGeom>
-          <a:solidFill>
-            <a:srgbClr val="CBD5E1"/>
-          </a:solidFill>
-          <a:ln>
-            <a:noFill/>
-          </a:ln>
-          <a:effectLst/>
-        </p:spPr>
-        <p:style>
-          <a:lnRef idx="1">
-            <a:schemeClr val="accent1"/>
-          </a:lnRef>
-          <a:fillRef idx="3">
-            <a:schemeClr val="accent1"/>
-          </a:fillRef>
-          <a:effectRef idx="2">
-            <a:schemeClr val="accent1"/>
-          </a:effectRef>
-          <a:fontRef idx="minor">
-            <a:schemeClr val="lt1"/>
-          </a:fontRef>
-        </p:style>
-        <p:txBody>
-          <a:bodyPr rtlCol="0" anchor="ctr"/>
-          <a:lstStyle/>
-          <a:p>
-            <a:pPr algn="ctr"/>
-          </a:p>
-        </p:txBody>
-      </p:sp>
-      <p:sp>
-        <p:nvSpPr>
-          <p:cNvPr id="5" name="Rounded Rectangle 4"/>
-          <p:cNvSpPr/>
-          <p:nvPr/>
-        </p:nvSpPr>
-        <p:spPr>
-          <a:xfrm>
-            <a:off x="762000" y="2219325"/>
-            <a:ext cx="495300" cy="495300"/>
-          </a:xfrm>
-          <a:prstGeom prst="roundRect">
-            <a:avLst>
-              <a:gd name="adj" fmla="val 50000"/>
-            </a:avLst>
-          </a:prstGeom>
-          <a:solidFill>
-            <a:srgbClr val="3B82F6"/>
-          </a:solidFill>
-          <a:ln>
-            <a:noFill/>
-          </a:ln>
-          <a:effectLst/>
-        </p:spPr>
-        <p:style>
-          <a:lnRef idx="1">
-            <a:schemeClr val="accent1"/>
-          </a:lnRef>
-          <a:fillRef idx="3">
-            <a:schemeClr val="accent1"/>
-          </a:fillRef>
-          <a:effectRef idx="2">
-            <a:schemeClr val="accent1"/>
-          </a:effectRef>
-          <a:fontRef idx="minor">
-            <a:schemeClr val="lt1"/>
-          </a:fontRef>
-        </p:style>
-        <p:txBody>
-          <a:bodyPr rtlCol="0" anchor="ctr"/>
-          <a:lstStyle/>
-          <a:p>
-            <a:pPr algn="ctr"/>
-          </a:p>
-        </p:txBody>
-      </p:sp>
-      <p:sp>
-        <p:nvSpPr>
-          <p:cNvPr id="6" name="Rounded Rectangle 5"/>
-          <p:cNvSpPr/>
-          <p:nvPr/>
-        </p:nvSpPr>
-        <p:spPr>
-          <a:xfrm>
-            <a:off x="4394150" y="2219325"/>
-            <a:ext cx="495300" cy="495300"/>
-          </a:xfrm>
-          <a:prstGeom prst="roundRect">
-            <a:avLst>
-              <a:gd name="adj" fmla="val 50000"/>
-            </a:avLst>
-          </a:prstGeom>
-          <a:solidFill>
-            <a:srgbClr val="3B82F6"/>
-          </a:solidFill>
-          <a:ln>
-            <a:noFill/>
-          </a:ln>
-          <a:effectLst/>
-        </p:spPr>
-        <p:style>
-          <a:lnRef idx="1">
-            <a:schemeClr val="accent1"/>
-          </a:lnRef>
-          <a:fillRef idx="3">
-            <a:schemeClr val="accent1"/>
-          </a:fillRef>
-          <a:effectRef idx="2">
-            <a:schemeClr val="accent1"/>
-          </a:effectRef>
-          <a:fontRef idx="minor">
-            <a:schemeClr val="lt1"/>
-          </a:fontRef>
-        </p:style>
-        <p:txBody>
-          <a:bodyPr rtlCol="0" anchor="ctr"/>
-          <a:lstStyle/>
-          <a:p>
-            <a:pPr algn="ctr"/>
-          </a:p>
-        </p:txBody>
-      </p:sp>
-      <p:sp>
-        <p:nvSpPr>
-          <p:cNvPr id="7" name="Rounded Rectangle 6"/>
-          <p:cNvSpPr/>
-          <p:nvPr/>
-        </p:nvSpPr>
-        <p:spPr>
-          <a:xfrm>
-            <a:off x="8026300" y="2219325"/>
-            <a:ext cx="495300" cy="495300"/>
-          </a:xfrm>
-          <a:prstGeom prst="roundRect">
-            <a:avLst>
-              <a:gd name="adj" fmla="val 50000"/>
-            </a:avLst>
-          </a:prstGeom>
-          <a:solidFill>
-            <a:srgbClr val="10B981"/>
-          </a:solidFill>
-          <a:ln>
-            <a:noFill/>
-          </a:ln>
-          <a:effectLst/>
-        </p:spPr>
-        <p:style>
-          <a:lnRef idx="1">
-            <a:schemeClr val="accent1"/>
-          </a:lnRef>
-          <a:fillRef idx="3">
-            <a:schemeClr val="accent1"/>
-          </a:fillRef>
-          <a:effectRef idx="2">
-            <a:schemeClr val="accent1"/>
-          </a:effectRef>
-          <a:fontRef idx="minor">
-            <a:schemeClr val="lt1"/>
-          </a:fontRef>
-        </p:style>
-        <p:txBody>
-          <a:bodyPr rtlCol="0" anchor="ctr"/>
-          <a:lstStyle/>
-          <a:p>
-            <a:pPr algn="ctr"/>
-          </a:p>
-        </p:txBody>
-      </p:sp>
-      <p:sp>
-        <p:nvSpPr>
-          <p:cNvPr id="8" name="TextBox 7"/>
-          <p:cNvSpPr txBox="1"/>
-          <p:nvPr/>
-        </p:nvSpPr>
-        <p:spPr>
-          <a:xfrm>
-            <a:off x="619125" y="2219325"/>
-            <a:ext cx="781050" cy="495300"/>
-          </a:xfrm>
-          <a:prstGeom prst="rect">
-            <a:avLst/>
-          </a:prstGeom>
-          <a:noFill/>
-        </p:spPr>
-        <p:txBody>
-          <a:bodyPr wrap="square" lIns="0" rIns="0" tIns="0" bIns="0" anchor="ctr">
-            <a:spAutoFit/>
-          </a:bodyPr>
-          <a:lstStyle/>
-          <a:p>
-            <a:pPr algn="ctr"/>
-            <a:r>
-              <a:rPr b="1" sz="1800" i="0" u="none">
-                <a:solidFill>
-                  <a:srgbClr val="FFFFFF"/>
-                </a:solidFill>
-                <a:latin typeface="Inter"/>
-              </a:rPr>
-              <a:t>1</a:t>
-            </a:r>
-          </a:p>
-        </p:txBody>
-      </p:sp>
-      <p:sp>
-        <p:nvSpPr>
-          <p:cNvPr id="9" name="TextBox 8"/>
-          <p:cNvSpPr txBox="1"/>
-          <p:nvPr/>
-        </p:nvSpPr>
-        <p:spPr>
-          <a:xfrm>
-            <a:off x="762000" y="2943225"/>
-            <a:ext cx="4467159" cy="228600"/>
-          </a:xfrm>
-          <a:prstGeom prst="rect">
-            <a:avLst/>
-          </a:prstGeom>
-          <a:noFill/>
-        </p:spPr>
-        <p:txBody>
-          <a:bodyPr wrap="none" lIns="0" rIns="0" tIns="0" bIns="0" anchor="t">
-            <a:spAutoFit/>
-          </a:bodyPr>
-          <a:lstStyle/>
-          <a:p>
-            <a:pPr algn="l"/>
-            <a:r>
-              <a:rPr b="1" sz="1500" i="0" u="none">
-                <a:solidFill>
-                  <a:srgbClr val="0F172A"/>
-                </a:solidFill>
-                <a:latin typeface="Inter"/>
-              </a:rPr>
-              <a:t>Coleta em Tempo Real</a:t>
-            </a:r>
-          </a:p>
-        </p:txBody>
-      </p:sp>
-      <p:sp>
-        <p:nvSpPr>
-          <p:cNvPr id="10" name="TextBox 9"/>
-          <p:cNvSpPr txBox="1"/>
-          <p:nvPr/>
-        </p:nvSpPr>
-        <p:spPr>
-          <a:xfrm>
-            <a:off x="762000" y="3248025"/>
-            <a:ext cx="3498800" cy="381000"/>
-          </a:xfrm>
-          <a:prstGeom prst="rect">
-            <a:avLst/>
-          </a:prstGeom>
-          <a:noFill/>
-        </p:spPr>
-        <p:txBody>
-          <a:bodyPr wrap="square" lIns="0" rIns="0" tIns="0" bIns="0" anchor="t">
-            <a:spAutoFit/>
-          </a:bodyPr>
-          <a:lstStyle/>
-          <a:p>
-            <a:pPr algn="l"/>
-            <a:r>
-              <a:rPr b="0" sz="1200" i="0" u="none">
-                <a:solidFill>
-                  <a:srgbClr val="475569"/>
-                </a:solidFill>
-                <a:latin typeface="Inter"/>
-              </a:rPr>
-              <a:t>Captura de sinais operacionais (atraso logístico, acionamento do SAC).</a:t>
-            </a:r>
-          </a:p>
-        </p:txBody>
-      </p:sp>
-      <p:sp>
-        <p:nvSpPr>
-          <p:cNvPr id="11" name="TextBox 10"/>
-          <p:cNvSpPr txBox="1"/>
-          <p:nvPr/>
-        </p:nvSpPr>
-        <p:spPr>
-          <a:xfrm>
-            <a:off x="4251275" y="2219325"/>
-            <a:ext cx="781050" cy="495300"/>
-          </a:xfrm>
-          <a:prstGeom prst="rect">
-            <a:avLst/>
-          </a:prstGeom>
-          <a:noFill/>
-        </p:spPr>
-        <p:txBody>
-          <a:bodyPr wrap="square" lIns="0" rIns="0" tIns="0" bIns="0" anchor="ctr">
-            <a:spAutoFit/>
-          </a:bodyPr>
-          <a:lstStyle/>
-          <a:p>
-            <a:pPr algn="ctr"/>
-            <a:r>
-              <a:rPr b="1" sz="1800" i="0" u="none">
-                <a:solidFill>
-                  <a:srgbClr val="FFFFFF"/>
-                </a:solidFill>
-                <a:latin typeface="Inter"/>
-              </a:rPr>
-              <a:t>2</a:t>
-            </a:r>
-          </a:p>
-        </p:txBody>
-      </p:sp>
-      <p:sp>
-        <p:nvSpPr>
-          <p:cNvPr id="12" name="TextBox 11"/>
-          <p:cNvSpPr txBox="1"/>
-          <p:nvPr/>
-        </p:nvSpPr>
-        <p:spPr>
-          <a:xfrm>
-            <a:off x="4394150" y="2943225"/>
-            <a:ext cx="4467159" cy="228600"/>
-          </a:xfrm>
-          <a:prstGeom prst="rect">
-            <a:avLst/>
-          </a:prstGeom>
-          <a:noFill/>
-        </p:spPr>
-        <p:txBody>
-          <a:bodyPr wrap="none" lIns="0" rIns="0" tIns="0" bIns="0" anchor="t">
-            <a:spAutoFit/>
-          </a:bodyPr>
-          <a:lstStyle/>
-          <a:p>
-            <a:pPr algn="l"/>
-            <a:r>
-              <a:rPr b="1" sz="1500" i="0" u="none">
-                <a:solidFill>
-                  <a:srgbClr val="0F172A"/>
-                </a:solidFill>
-                <a:latin typeface="Inter"/>
-              </a:rPr>
-              <a:t>Classificação via IA</a:t>
-            </a:r>
-          </a:p>
-        </p:txBody>
-      </p:sp>
-      <p:sp>
-        <p:nvSpPr>
-          <p:cNvPr id="13" name="TextBox 12"/>
-          <p:cNvSpPr txBox="1"/>
-          <p:nvPr/>
-        </p:nvSpPr>
-        <p:spPr>
-          <a:xfrm>
-            <a:off x="4394150" y="3248025"/>
-            <a:ext cx="3498800" cy="381000"/>
-          </a:xfrm>
-          <a:prstGeom prst="rect">
-            <a:avLst/>
-          </a:prstGeom>
-          <a:noFill/>
-        </p:spPr>
-        <p:txBody>
-          <a:bodyPr wrap="square" lIns="0" rIns="0" tIns="0" bIns="0" anchor="t">
-            <a:spAutoFit/>
-          </a:bodyPr>
-          <a:lstStyle/>
-          <a:p>
-            <a:pPr algn="l"/>
-            <a:r>
-              <a:rPr b="0" sz="1200" i="0" u="none">
-                <a:solidFill>
-                  <a:srgbClr val="475569"/>
-                </a:solidFill>
-                <a:latin typeface="Inter"/>
-              </a:rPr>
-              <a:t>Algoritmo identifica se o cliente tem alto risco de detração antes da entrega.</a:t>
-            </a:r>
-          </a:p>
-        </p:txBody>
-      </p:sp>
-      <p:sp>
-        <p:nvSpPr>
-          <p:cNvPr id="14" name="TextBox 13"/>
-          <p:cNvSpPr txBox="1"/>
-          <p:nvPr/>
-        </p:nvSpPr>
-        <p:spPr>
-          <a:xfrm>
-            <a:off x="7883425" y="2219325"/>
-            <a:ext cx="781050" cy="495300"/>
-          </a:xfrm>
-          <a:prstGeom prst="rect">
-            <a:avLst/>
-          </a:prstGeom>
-          <a:noFill/>
-        </p:spPr>
-        <p:txBody>
-          <a:bodyPr wrap="square" lIns="0" rIns="0" tIns="0" bIns="0" anchor="ctr">
-            <a:spAutoFit/>
-          </a:bodyPr>
-          <a:lstStyle/>
-          <a:p>
-            <a:pPr algn="ctr"/>
-            <a:r>
-              <a:rPr b="1" sz="1800" i="0" u="none">
-                <a:solidFill>
-                  <a:srgbClr val="F8FAFC"/>
-                </a:solidFill>
-                <a:latin typeface="Inter"/>
-              </a:rPr>
-              <a:t>3</a:t>
-            </a:r>
-          </a:p>
-        </p:txBody>
-      </p:sp>
-      <p:sp>
-        <p:nvSpPr>
-          <p:cNvPr id="15" name="TextBox 14"/>
-          <p:cNvSpPr txBox="1"/>
-          <p:nvPr/>
-        </p:nvSpPr>
-        <p:spPr>
-          <a:xfrm>
-            <a:off x="8026300" y="2943225"/>
-            <a:ext cx="4165699" cy="228600"/>
-          </a:xfrm>
-          <a:prstGeom prst="rect">
-            <a:avLst/>
-          </a:prstGeom>
-          <a:noFill/>
-        </p:spPr>
-        <p:txBody>
-          <a:bodyPr wrap="none" lIns="0" rIns="0" tIns="0" bIns="0" anchor="t">
-            <a:spAutoFit/>
-          </a:bodyPr>
-          <a:lstStyle/>
-          <a:p>
-            <a:pPr algn="l"/>
-            <a:r>
-              <a:rPr b="1" sz="1500" i="0" u="none">
-                <a:solidFill>
-                  <a:srgbClr val="0F172A"/>
-                </a:solidFill>
-                <a:latin typeface="Inter"/>
-              </a:rPr>
-              <a:t>Ação Preventiva</a:t>
-            </a:r>
-          </a:p>
-        </p:txBody>
-      </p:sp>
-      <p:sp>
-        <p:nvSpPr>
-          <p:cNvPr id="16" name="TextBox 15"/>
-          <p:cNvSpPr txBox="1"/>
-          <p:nvPr/>
-        </p:nvSpPr>
-        <p:spPr>
-          <a:xfrm>
-            <a:off x="8026300" y="3248025"/>
-            <a:ext cx="3498800" cy="381000"/>
-          </a:xfrm>
-          <a:prstGeom prst="rect">
-            <a:avLst/>
-          </a:prstGeom>
-          <a:noFill/>
-        </p:spPr>
-        <p:txBody>
-          <a:bodyPr wrap="square" lIns="0" rIns="0" tIns="0" bIns="0" anchor="t">
-            <a:spAutoFit/>
-          </a:bodyPr>
-          <a:lstStyle/>
-          <a:p>
-            <a:pPr algn="l"/>
-            <a:r>
-              <a:rPr b="0" sz="1200" i="0" u="none">
-                <a:solidFill>
-                  <a:srgbClr val="475569"/>
-                </a:solidFill>
-                <a:latin typeface="Inter"/>
-              </a:rPr>
-              <a:t>Atendimento entra em contato com soluções compensatórias imediatas.</a:t>
-            </a:r>
-          </a:p>
-        </p:txBody>
-      </p:sp>
-    </p:spTree>
-  </p:cSld>
-  <p:clrMapOvr>
-    <a:masterClrMapping/>
-  </p:clrMapOvr>
-</p:sld>
+<ns0:sld xmlns:ns0="http://schemas.openxmlformats.org/presentationml/2006/main" xmlns:ns1="http://schemas.openxmlformats.org/drawingml/2006/main">
+  <ns0:cSld>
+    <ns0:bg>
+      <ns0:bgPr>
+        <ns1:solidFill>
+          <ns1:srgbClr val="F8FAFC"/>
+        </ns1:solidFill>
+        <ns1:effectLst/>
+      </ns0:bgPr>
+    </ns0:bg>
+    <ns0:spTree>
+      <ns0:nvGrpSpPr>
+        <ns0:cNvPr id="1" name=""/>
+        <ns0:cNvGrpSpPr/>
+        <ns0:nvPr/>
+      </ns0:nvGrpSpPr>
+      <ns0:grpSpPr/>
+      <ns0:sp>
+        <ns0:nvSpPr>
+          <ns0:cNvPr id="2" name="TextBox 1"/>
+          <ns0:cNvSpPr txBox="1"/>
+          <ns0:nvPr/>
+        </ns0:nvSpPr>
+        <ns0:spPr>
+          <ns1:xfrm>
+            <ns1:off x="762000" y="762000"/>
+            <ns1:ext cx="11430000" cy="466725"/>
+          </ns1:xfrm>
+          <ns1:prstGeom prst="rect">
+            <ns1:avLst/>
+          </ns1:prstGeom>
+          <ns1:noFill/>
+        </ns0:spPr>
+        <ns0:txBody>
+          <ns1:bodyPr wrap="none" lIns="0" rIns="0" tIns="0" bIns="0" anchor="t">
+            <ns1:spAutoFit/>
+          </ns1:bodyPr>
+          <ns1:lstStyle/>
+          <ns1:p>
+            <ns1:pPr algn="l"/>
+            <ns1:r>
+              <ns1:rPr b="1" sz="3000" i="0" u="none">
+                <ns1:solidFill>
+                  <ns1:srgbClr val="0F172A"/>
+                </ns1:solidFill>
+                <ns1:latin typeface="Inter"/>
+              </ns1:rPr>
+              <ns1:t>Modelo preditivo: etapa futura</ns1:t>
+            </ns1:r>
+          </ns1:p>
+        </ns0:txBody>
+      </ns0:sp>
+      <ns0:sp>
+        <ns0:nvSpPr>
+          <ns0:cNvPr id="3" name="TextBox 2"/>
+          <ns0:cNvSpPr txBox="1"/>
+          <ns0:nvPr/>
+        </ns0:nvSpPr>
+        <ns0:spPr>
+          <ns1:xfrm>
+            <ns1:off x="762000" y="1381125"/>
+            <ns1:ext cx="11430000" cy="228600"/>
+          </ns1:xfrm>
+          <ns1:prstGeom prst="rect">
+            <ns1:avLst/>
+          </ns1:prstGeom>
+          <ns1:noFill/>
+        </ns0:spPr>
+        <ns0:txBody>
+          <ns1:bodyPr wrap="none" lIns="0" rIns="0" tIns="0" bIns="0" anchor="t">
+            <ns1:spAutoFit/>
+          </ns1:bodyPr>
+          <ns1:lstStyle/>
+          <ns1:p>
+            <ns1:pPr algn="l"/>
+            <ns1:r>
+              <ns1:rPr b="0" sz="1500" i="0" u="none">
+                <ns1:solidFill>
+                  <ns1:srgbClr val="64748B"/>
+                </ns1:solidFill>
+                <ns1:latin typeface="Inter"/>
+              </ns1:rPr>
+              <ns1:t>Proposta ainda não implementada; depende de validação com dados reais.</ns1:t>
+            </ns1:r>
+          </ns1:p>
+        </ns0:txBody>
+      </ns0:sp>
+      <ns0:sp>
+        <ns0:nvSpPr>
+          <ns0:cNvPr id="4" name="Rectangle 3"/>
+          <ns0:cNvSpPr/>
+          <ns0:nvPr/>
+        </ns0:nvSpPr>
+        <ns0:spPr>
+          <ns1:xfrm>
+            <ns1:off x="762000" y="2447925"/>
+            <ns1:ext cx="10668000" cy="38100"/>
+          </ns1:xfrm>
+          <ns1:prstGeom prst="rect">
+            <ns1:avLst/>
+          </ns1:prstGeom>
+          <ns1:solidFill>
+            <ns1:srgbClr val="CBD5E1"/>
+          </ns1:solidFill>
+          <ns1:ln>
+            <ns1:noFill/>
+          </ns1:ln>
+          <ns1:effectLst/>
+        </ns0:spPr>
+        <ns0:style>
+          <ns1:lnRef idx="1">
+            <ns1:schemeClr val="accent1"/>
+          </ns1:lnRef>
+          <ns1:fillRef idx="3">
+            <ns1:schemeClr val="accent1"/>
+          </ns1:fillRef>
+          <ns1:effectRef idx="2">
+            <ns1:schemeClr val="accent1"/>
+          </ns1:effectRef>
+          <ns1:fontRef idx="minor">
+            <ns1:schemeClr val="lt1"/>
+          </ns1:fontRef>
+        </ns0:style>
+        <ns0:txBody>
+          <ns1:bodyPr rtlCol="0" anchor="ctr"/>
+          <ns1:lstStyle/>
+          <ns1:p>
+            <ns1:pPr algn="ctr"/>
+          </ns1:p>
+        </ns0:txBody>
+      </ns0:sp>
+      <ns0:sp>
+        <ns0:nvSpPr>
+          <ns0:cNvPr id="5" name="Rounded Rectangle 4"/>
+          <ns0:cNvSpPr/>
+          <ns0:nvPr/>
+        </ns0:nvSpPr>
+        <ns0:spPr>
+          <ns1:xfrm>
+            <ns1:off x="762000" y="2219325"/>
+            <ns1:ext cx="495300" cy="495300"/>
+          </ns1:xfrm>
+          <ns1:prstGeom prst="roundRect">
+            <ns1:avLst>
+              <ns1:gd name="adj" fmla="val 50000"/>
+            </ns1:avLst>
+          </ns1:prstGeom>
+          <ns1:solidFill>
+            <ns1:srgbClr val="3B82F6"/>
+          </ns1:solidFill>
+          <ns1:ln>
+            <ns1:noFill/>
+          </ns1:ln>
+          <ns1:effectLst/>
+        </ns0:spPr>
+        <ns0:style>
+          <ns1:lnRef idx="1">
+            <ns1:schemeClr val="accent1"/>
+          </ns1:lnRef>
+          <ns1:fillRef idx="3">
+            <ns1:schemeClr val="accent1"/>
+          </ns1:fillRef>
+          <ns1:effectRef idx="2">
+            <ns1:schemeClr val="accent1"/>
+          </ns1:effectRef>
+          <ns1:fontRef idx="minor">
+            <ns1:schemeClr val="lt1"/>
+          </ns1:fontRef>
+        </ns0:style>
+        <ns0:txBody>
+          <ns1:bodyPr rtlCol="0" anchor="ctr"/>
+          <ns1:lstStyle/>
+          <ns1:p>
+            <ns1:pPr algn="ctr"/>
+          </ns1:p>
+        </ns0:txBody>
+      </ns0:sp>
+      <ns0:sp>
+        <ns0:nvSpPr>
+          <ns0:cNvPr id="6" name="Rounded Rectangle 5"/>
+          <ns0:cNvSpPr/>
+          <ns0:nvPr/>
+        </ns0:nvSpPr>
+        <ns0:spPr>
+          <ns1:xfrm>
+            <ns1:off x="4394150" y="2219325"/>
+            <ns1:ext cx="495300" cy="495300"/>
+          </ns1:xfrm>
+          <ns1:prstGeom prst="roundRect">
+            <ns1:avLst>
+              <ns1:gd name="adj" fmla="val 50000"/>
+            </ns1:avLst>
+          </ns1:prstGeom>
+          <ns1:solidFill>
+            <ns1:srgbClr val="3B82F6"/>
+          </ns1:solidFill>
+          <ns1:ln>
+            <ns1:noFill/>
+          </ns1:ln>
+          <ns1:effectLst/>
+        </ns0:spPr>
+        <ns0:style>
+          <ns1:lnRef idx="1">
+            <ns1:schemeClr val="accent1"/>
+          </ns1:lnRef>
+          <ns1:fillRef idx="3">
+            <ns1:schemeClr val="accent1"/>
+          </ns1:fillRef>
+          <ns1:effectRef idx="2">
+            <ns1:schemeClr val="accent1"/>
+          </ns1:effectRef>
+          <ns1:fontRef idx="minor">
+            <ns1:schemeClr val="lt1"/>
+          </ns1:fontRef>
+        </ns0:style>
+        <ns0:txBody>
+          <ns1:bodyPr rtlCol="0" anchor="ctr"/>
+          <ns1:lstStyle/>
+          <ns1:p>
+            <ns1:pPr algn="ctr"/>
+          </ns1:p>
+        </ns0:txBody>
+      </ns0:sp>
+      <ns0:sp>
+        <ns0:nvSpPr>
+          <ns0:cNvPr id="7" name="Rounded Rectangle 6"/>
+          <ns0:cNvSpPr/>
+          <ns0:nvPr/>
+        </ns0:nvSpPr>
+        <ns0:spPr>
+          <ns1:xfrm>
+            <ns1:off x="8026300" y="2219325"/>
+            <ns1:ext cx="495300" cy="495300"/>
+          </ns1:xfrm>
+          <ns1:prstGeom prst="roundRect">
+            <ns1:avLst>
+              <ns1:gd name="adj" fmla="val 50000"/>
+            </ns1:avLst>
+          </ns1:prstGeom>
+          <ns1:solidFill>
+            <ns1:srgbClr val="10B981"/>
+          </ns1:solidFill>
+          <ns1:ln>
+            <ns1:noFill/>
+          </ns1:ln>
+          <ns1:effectLst/>
+        </ns0:spPr>
+        <ns0:style>
+          <ns1:lnRef idx="1">
+            <ns1:schemeClr val="accent1"/>
+          </ns1:lnRef>
+          <ns1:fillRef idx="3">
+            <ns1:schemeClr val="accent1"/>
+          </ns1:fillRef>
+          <ns1:effectRef idx="2">
+            <ns1:schemeClr val="accent1"/>
+          </ns1:effectRef>
+          <ns1:fontRef idx="minor">
+            <ns1:schemeClr val="lt1"/>
+          </ns1:fontRef>
+        </ns0:style>
+        <ns0:txBody>
+          <ns1:bodyPr rtlCol="0" anchor="ctr"/>
+          <ns1:lstStyle/>
+          <ns1:p>
+            <ns1:pPr algn="ctr"/>
+          </ns1:p>
+        </ns0:txBody>
+      </ns0:sp>
+      <ns0:sp>
+        <ns0:nvSpPr>
+          <ns0:cNvPr id="8" name="TextBox 7"/>
+          <ns0:cNvSpPr txBox="1"/>
+          <ns0:nvPr/>
+        </ns0:nvSpPr>
+        <ns0:spPr>
+          <ns1:xfrm>
+            <ns1:off x="619125" y="2219325"/>
+            <ns1:ext cx="781050" cy="495300"/>
+          </ns1:xfrm>
+          <ns1:prstGeom prst="rect">
+            <ns1:avLst/>
+          </ns1:prstGeom>
+          <ns1:noFill/>
+        </ns0:spPr>
+        <ns0:txBody>
+          <ns1:bodyPr wrap="square" lIns="0" rIns="0" tIns="0" bIns="0" anchor="ctr">
+            <ns1:spAutoFit/>
+          </ns1:bodyPr>
+          <ns1:lstStyle/>
+          <ns1:p>
+            <ns1:pPr algn="ctr"/>
+            <ns1:r>
+              <ns1:rPr b="1" sz="1800" i="0" u="none">
+                <ns1:solidFill>
+                  <ns1:srgbClr val="FFFFFF"/>
+                </ns1:solidFill>
+                <ns1:latin typeface="Inter"/>
+              </ns1:rPr>
+              <ns1:t>1</ns1:t>
+            </ns1:r>
+          </ns1:p>
+        </ns0:txBody>
+      </ns0:sp>
+      <ns0:sp>
+        <ns0:nvSpPr>
+          <ns0:cNvPr id="9" name="TextBox 8"/>
+          <ns0:cNvSpPr txBox="1"/>
+          <ns0:nvPr/>
+        </ns0:nvSpPr>
+        <ns0:spPr>
+          <ns1:xfrm>
+            <ns1:off x="762000" y="2943225"/>
+            <ns1:ext cx="4467159" cy="228600"/>
+          </ns1:xfrm>
+          <ns1:prstGeom prst="rect">
+            <ns1:avLst/>
+          </ns1:prstGeom>
+          <ns1:noFill/>
+        </ns0:spPr>
+        <ns0:txBody>
+          <ns1:bodyPr wrap="none" lIns="0" rIns="0" tIns="0" bIns="0" anchor="t">
+            <ns1:spAutoFit/>
+          </ns1:bodyPr>
+          <ns1:lstStyle/>
+          <ns1:p>
+            <ns1:pPr algn="l"/>
+            <ns1:r>
+              <ns1:rPr b="1" sz="1500" i="0" u="none">
+                <ns1:solidFill>
+                  <ns1:srgbClr val="0F172A"/>
+                </ns1:solidFill>
+                <ns1:latin typeface="Inter"/>
+              </ns1:rPr>
+              <ns1:t>Definir o momento da decisão</ns1:t>
+            </ns1:r>
+          </ns1:p>
+        </ns0:txBody>
+      </ns0:sp>
+      <ns0:sp>
+        <ns0:nvSpPr>
+          <ns0:cNvPr id="10" name="TextBox 9"/>
+          <ns0:cNvSpPr txBox="1"/>
+          <ns0:nvPr/>
+        </ns0:nvSpPr>
+        <ns0:spPr>
+          <ns1:xfrm>
+            <ns1:off x="762000" y="3248025"/>
+            <ns1:ext cx="3498800" cy="381000"/>
+          </ns1:xfrm>
+          <ns1:prstGeom prst="rect">
+            <ns1:avLst/>
+          </ns1:prstGeom>
+          <ns1:noFill/>
+        </ns0:spPr>
+        <ns0:txBody>
+          <ns1:bodyPr wrap="square" lIns="0" rIns="0" tIns="0" bIns="0" anchor="t">
+            <ns1:spAutoFit/>
+          </ns1:bodyPr>
+          <ns1:lstStyle/>
+          <ns1:p>
+            <ns1:pPr algn="l"/>
+            <ns1:r>
+              <ns1:rPr b="0" sz="1200" i="0" u="none">
+                <ns1:solidFill>
+                  <ns1:srgbClr val="475569"/>
+                </ns1:solidFill>
+                <ns1:latin typeface="Inter"/>
+              </ns1:rPr>
+              <ns1:t>Atraso realizado e atendimento são sinais disponíveis durante ou após a jornada.</ns1:t>
+            </ns1:r>
+          </ns1:p>
+        </ns0:txBody>
+      </ns0:sp>
+      <ns0:sp>
+        <ns0:nvSpPr>
+          <ns0:cNvPr id="11" name="TextBox 10"/>
+          <ns0:cNvSpPr txBox="1"/>
+          <ns0:nvPr/>
+        </ns0:nvSpPr>
+        <ns0:spPr>
+          <ns1:xfrm>
+            <ns1:off x="4251275" y="2219325"/>
+            <ns1:ext cx="781050" cy="495300"/>
+          </ns1:xfrm>
+          <ns1:prstGeom prst="rect">
+            <ns1:avLst/>
+          </ns1:prstGeom>
+          <ns1:noFill/>
+        </ns0:spPr>
+        <ns0:txBody>
+          <ns1:bodyPr wrap="square" lIns="0" rIns="0" tIns="0" bIns="0" anchor="ctr">
+            <ns1:spAutoFit/>
+          </ns1:bodyPr>
+          <ns1:lstStyle/>
+          <ns1:p>
+            <ns1:pPr algn="ctr"/>
+            <ns1:r>
+              <ns1:rPr b="1" sz="1800" i="0" u="none">
+                <ns1:solidFill>
+                  <ns1:srgbClr val="FFFFFF"/>
+                </ns1:solidFill>
+                <ns1:latin typeface="Inter"/>
+              </ns1:rPr>
+              <ns1:t>2</ns1:t>
+            </ns1:r>
+          </ns1:p>
+        </ns0:txBody>
+      </ns0:sp>
+      <ns0:sp>
+        <ns0:nvSpPr>
+          <ns0:cNvPr id="12" name="TextBox 11"/>
+          <ns0:cNvSpPr txBox="1"/>
+          <ns0:nvPr/>
+        </ns0:nvSpPr>
+        <ns0:spPr>
+          <ns1:xfrm>
+            <ns1:off x="4394150" y="2943225"/>
+            <ns1:ext cx="4467159" cy="228600"/>
+          </ns1:xfrm>
+          <ns1:prstGeom prst="rect">
+            <ns1:avLst/>
+          </ns1:prstGeom>
+          <ns1:noFill/>
+        </ns0:spPr>
+        <ns0:txBody>
+          <ns1:bodyPr wrap="none" lIns="0" rIns="0" tIns="0" bIns="0" anchor="t">
+            <ns1:spAutoFit/>
+          </ns1:bodyPr>
+          <ns1:lstStyle/>
+          <ns1:p>
+            <ns1:pPr algn="l"/>
+            <ns1:r>
+              <ns1:rPr b="1" sz="1500" i="0" u="none">
+                <ns1:solidFill>
+                  <ns1:srgbClr val="0F172A"/>
+                </ns1:solidFill>
+                <ns1:latin typeface="Inter"/>
+              </ns1:rPr>
+              <ns1:t>Construir e validar</ns1:t>
+            </ns1:r>
+          </ns1:p>
+        </ns0:txBody>
+      </ns0:sp>
+      <ns0:sp>
+        <ns0:nvSpPr>
+          <ns0:cNvPr id="13" name="TextBox 12"/>
+          <ns0:cNvSpPr txBox="1"/>
+          <ns0:nvPr/>
+        </ns0:nvSpPr>
+        <ns0:spPr>
+          <ns1:xfrm>
+            <ns1:off x="4394150" y="3248025"/>
+            <ns1:ext cx="3498800" cy="381000"/>
+          </ns1:xfrm>
+          <ns1:prstGeom prst="rect">
+            <ns1:avLst/>
+          </ns1:prstGeom>
+          <ns1:noFill/>
+        </ns0:spPr>
+        <ns0:txBody>
+          <ns1:bodyPr wrap="square" lIns="0" rIns="0" tIns="0" bIns="0" anchor="t">
+            <ns1:spAutoFit/>
+          </ns1:bodyPr>
+          <ns1:lstStyle/>
+          <ns1:p>
+            <ns1:pPr algn="l"/>
+            <ns1:r>
+              <ns1:rPr b="0" sz="1200" i="0" u="none">
+                <ns1:solidFill>
+                  <ns1:srgbClr val="475569"/>
+                </ns1:solidFill>
+                <ns1:latin typeface="Inter"/>
+              </ns1:rPr>
+              <ns1:t>Não há modelo ou métricas nesta entrega; prever antes da entrega exige sinais antecedentes.</ns1:t>
+            </ns1:r>
+          </ns1:p>
+        </ns0:txBody>
+      </ns0:sp>
+      <ns0:sp>
+        <ns0:nvSpPr>
+          <ns0:cNvPr id="14" name="TextBox 13"/>
+          <ns0:cNvSpPr txBox="1"/>
+          <ns0:nvPr/>
+        </ns0:nvSpPr>
+        <ns0:spPr>
+          <ns1:xfrm>
+            <ns1:off x="7883425" y="2219325"/>
+            <ns1:ext cx="781050" cy="495300"/>
+          </ns1:xfrm>
+          <ns1:prstGeom prst="rect">
+            <ns1:avLst/>
+          </ns1:prstGeom>
+          <ns1:noFill/>
+        </ns0:spPr>
+        <ns0:txBody>
+          <ns1:bodyPr wrap="square" lIns="0" rIns="0" tIns="0" bIns="0" anchor="ctr">
+            <ns1:spAutoFit/>
+          </ns1:bodyPr>
+          <ns1:lstStyle/>
+          <ns1:p>
+            <ns1:pPr algn="ctr"/>
+            <ns1:r>
+              <ns1:rPr b="1" sz="1800" i="0" u="none">
+                <ns1:solidFill>
+                  <ns1:srgbClr val="F8FAFC"/>
+                </ns1:solidFill>
+                <ns1:latin typeface="Inter"/>
+              </ns1:rPr>
+              <ns1:t>3</ns1:t>
+            </ns1:r>
+          </ns1:p>
+        </ns0:txBody>
+      </ns0:sp>
+      <ns0:sp>
+        <ns0:nvSpPr>
+          <ns0:cNvPr id="15" name="TextBox 14"/>
+          <ns0:cNvSpPr txBox="1"/>
+          <ns0:nvPr/>
+        </ns0:nvSpPr>
+        <ns0:spPr>
+          <ns1:xfrm>
+            <ns1:off x="8026300" y="2943225"/>
+            <ns1:ext cx="4165699" cy="228600"/>
+          </ns1:xfrm>
+          <ns1:prstGeom prst="rect">
+            <ns1:avLst/>
+          </ns1:prstGeom>
+          <ns1:noFill/>
+        </ns0:spPr>
+        <ns0:txBody>
+          <ns1:bodyPr wrap="none" lIns="0" rIns="0" tIns="0" bIns="0" anchor="t">
+            <ns1:spAutoFit/>
+          </ns1:bodyPr>
+          <ns1:lstStyle/>
+          <ns1:p>
+            <ns1:pPr algn="l"/>
+            <ns1:r>
+              <ns1:rPr b="1" sz="1500" i="0" u="none">
+                <ns1:solidFill>
+                  <ns1:srgbClr val="0F172A"/>
+                </ns1:solidFill>
+                <ns1:latin typeface="Inter"/>
+              </ns1:rPr>
+              <ns1:t>Testar a intervenção</ns1:t>
+            </ns1:r>
+          </ns1:p>
+        </ns0:txBody>
+      </ns0:sp>
+      <ns0:sp>
+        <ns0:nvSpPr>
+          <ns0:cNvPr id="16" name="TextBox 15"/>
+          <ns0:cNvSpPr txBox="1"/>
+          <ns0:nvPr/>
+        </ns0:nvSpPr>
+        <ns0:spPr>
+          <ns1:xfrm>
+            <ns1:off x="8026300" y="3248025"/>
+            <ns1:ext cx="3498800" cy="381000"/>
+          </ns1:xfrm>
+          <ns1:prstGeom prst="rect">
+            <ns1:avLst/>
+          </ns1:prstGeom>
+          <ns1:noFill/>
+        </ns0:spPr>
+        <ns0:txBody>
+          <ns1:bodyPr wrap="square" lIns="0" rIns="0" tIns="0" bIns="0" anchor="t">
+            <ns1:spAutoFit/>
+          </ns1:bodyPr>
+          <ns1:lstStyle/>
+          <ns1:p>
+            <ns1:pPr algn="l"/>
+            <ns1:r>
+              <ns1:rPr b="0" sz="1200" i="0" u="none">
+                <ns1:solidFill>
+                  <ns1:srgbClr val="475569"/>
+                </ns1:solidFill>
+                <ns1:latin typeface="Inter"/>
+              </ns1:rPr>
+              <ns1:t>Medir resultado em piloto controlado antes de afirmar efeito ou ROI.</ns1:t>
+            </ns1:r>
+          </ns1:p>
+        </ns0:txBody>
+      </ns0:sp>
+    </ns0:spTree>
+  </ns0:cSld>
+  <ns0:clrMapOvr>
+    <ns1:masterClrMapping/>
+  </ns0:clrMapOvr>
+</ns0:sld>
 </file>
 
 <file path=ppt/slides/slide9.xml><?xml version="1.0" encoding="utf-8"?>
-<p:sld xmlns:a="http://schemas.openxmlformats.org/drawingml/2006/main" xmlns:p="http://schemas.openxmlformats.org/presentationml/2006/main" xmlns:r="http://schemas.openxmlformats.org/officeDocument/2006/relationships">
-  <p:cSld>
-    <p:bg>
-      <p:bgPr>
-        <a:solidFill>
-          <a:srgbClr val="FFFFFF"/>
-        </a:solidFill>
-        <a:effectLst/>
-      </p:bgPr>
-    </p:bg>
-    <p:spTree>
-      <p:nvGrpSpPr>
-        <p:cNvPr id="1" name=""/>
-        <p:cNvGrpSpPr/>
-        <p:nvPr/>
-      </p:nvGrpSpPr>
-      <p:grpSpPr/>
-      <p:sp>
-        <p:nvSpPr>
-          <p:cNvPr id="2" name="Rounded Rectangle 1"/>
-          <p:cNvSpPr/>
-          <p:nvPr/>
-        </p:nvSpPr>
-        <p:spPr>
-          <a:xfrm>
-            <a:off x="762000" y="1685925"/>
-            <a:ext cx="3403550" cy="4410075"/>
-          </a:xfrm>
-          <a:prstGeom prst="roundRect">
-            <a:avLst>
-              <a:gd name="adj" fmla="val 3358"/>
-            </a:avLst>
-          </a:prstGeom>
-          <a:noFill/>
-          <a:ln w="19050">
-            <a:solidFill>
-              <a:srgbClr val="E2E8F0"/>
-            </a:solidFill>
-          </a:ln>
-          <a:effectLst/>
-        </p:spPr>
-        <p:style>
-          <a:lnRef idx="1">
-            <a:schemeClr val="accent1"/>
-          </a:lnRef>
-          <a:fillRef idx="3">
-            <a:schemeClr val="accent1"/>
-          </a:fillRef>
-          <a:effectRef idx="2">
-            <a:schemeClr val="accent1"/>
-          </a:effectRef>
-          <a:fontRef idx="minor">
-            <a:schemeClr val="lt1"/>
-          </a:fontRef>
-        </p:style>
-        <p:txBody>
-          <a:bodyPr rtlCol="0" anchor="ctr"/>
-          <a:lstStyle/>
-          <a:p>
-            <a:pPr algn="ctr"/>
-          </a:p>
-        </p:txBody>
-      </p:sp>
-      <p:sp>
-        <p:nvSpPr>
-          <p:cNvPr id="3" name="Rounded Rectangle 2"/>
-          <p:cNvSpPr/>
-          <p:nvPr/>
-        </p:nvSpPr>
-        <p:spPr>
-          <a:xfrm>
-            <a:off x="4394150" y="1685925"/>
-            <a:ext cx="3403550" cy="4410075"/>
-          </a:xfrm>
-          <a:prstGeom prst="roundRect">
-            <a:avLst>
-              <a:gd name="adj" fmla="val 3358"/>
-            </a:avLst>
-          </a:prstGeom>
-          <a:noFill/>
-          <a:ln w="19050">
-            <a:solidFill>
-              <a:srgbClr val="E2E8F0"/>
-            </a:solidFill>
-          </a:ln>
-          <a:effectLst/>
-        </p:spPr>
-        <p:style>
-          <a:lnRef idx="1">
-            <a:schemeClr val="accent1"/>
-          </a:lnRef>
-          <a:fillRef idx="3">
-            <a:schemeClr val="accent1"/>
-          </a:fillRef>
-          <a:effectRef idx="2">
-            <a:schemeClr val="accent1"/>
-          </a:effectRef>
-          <a:fontRef idx="minor">
-            <a:schemeClr val="lt1"/>
-          </a:fontRef>
-        </p:style>
-        <p:txBody>
-          <a:bodyPr rtlCol="0" anchor="ctr"/>
-          <a:lstStyle/>
-          <a:p>
-            <a:pPr algn="ctr"/>
-          </a:p>
-        </p:txBody>
-      </p:sp>
-      <p:sp>
-        <p:nvSpPr>
-          <p:cNvPr id="4" name="Rounded Rectangle 3"/>
-          <p:cNvSpPr/>
-          <p:nvPr/>
-        </p:nvSpPr>
-        <p:spPr>
-          <a:xfrm>
-            <a:off x="8026300" y="1685925"/>
-            <a:ext cx="3403550" cy="4410075"/>
-          </a:xfrm>
-          <a:prstGeom prst="roundRect">
-            <a:avLst>
-              <a:gd name="adj" fmla="val 3358"/>
-            </a:avLst>
-          </a:prstGeom>
-          <a:noFill/>
-          <a:ln w="19050">
-            <a:solidFill>
-              <a:srgbClr val="E2E8F0"/>
-            </a:solidFill>
-          </a:ln>
-          <a:effectLst/>
-        </p:spPr>
-        <p:style>
-          <a:lnRef idx="1">
-            <a:schemeClr val="accent1"/>
-          </a:lnRef>
-          <a:fillRef idx="3">
-            <a:schemeClr val="accent1"/>
-          </a:fillRef>
-          <a:effectRef idx="2">
-            <a:schemeClr val="accent1"/>
-          </a:effectRef>
-          <a:fontRef idx="minor">
-            <a:schemeClr val="lt1"/>
-          </a:fontRef>
-        </p:style>
-        <p:txBody>
-          <a:bodyPr rtlCol="0" anchor="ctr"/>
-          <a:lstStyle/>
-          <a:p>
-            <a:pPr algn="ctr"/>
-          </a:p>
-        </p:txBody>
-      </p:sp>
-      <p:pic>
-        <p:nvPicPr>
-          <p:cNvPr id="5" name="Picture 4" descr="image.png"/>
-          <p:cNvPicPr>
-            <a:picLocks noChangeAspect="1"/>
-          </p:cNvPicPr>
-          <p:nvPr/>
-        </p:nvPicPr>
-        <p:blipFill>
-          <a:blip r:embed="rId2"/>
-          <a:stretch>
-            <a:fillRect/>
-          </a:stretch>
-        </p:blipFill>
-        <p:spPr>
-          <a:xfrm>
-            <a:off x="1085850" y="2009775"/>
-            <a:ext cx="304800" cy="304800"/>
-          </a:xfrm>
-          <a:prstGeom prst="rect">
-            <a:avLst/>
-          </a:prstGeom>
-        </p:spPr>
-      </p:pic>
-      <p:pic>
-        <p:nvPicPr>
-          <p:cNvPr id="6" name="Picture 5" descr="image.png"/>
-          <p:cNvPicPr>
-            <a:picLocks noChangeAspect="1"/>
-          </p:cNvPicPr>
-          <p:nvPr/>
-        </p:nvPicPr>
-        <p:blipFill>
-          <a:blip r:embed="rId3"/>
-          <a:stretch>
-            <a:fillRect/>
-          </a:stretch>
-        </p:blipFill>
-        <p:spPr>
-          <a:xfrm>
-            <a:off x="4718000" y="2009775"/>
-            <a:ext cx="266700" cy="304800"/>
-          </a:xfrm>
-          <a:prstGeom prst="rect">
-            <a:avLst/>
-          </a:prstGeom>
-        </p:spPr>
-      </p:pic>
-      <p:pic>
-        <p:nvPicPr>
-          <p:cNvPr id="7" name="Picture 6" descr="image.png"/>
-          <p:cNvPicPr>
-            <a:picLocks noChangeAspect="1"/>
-          </p:cNvPicPr>
-          <p:nvPr/>
-        </p:nvPicPr>
-        <p:blipFill>
-          <a:blip r:embed="rId4"/>
-          <a:stretch>
-            <a:fillRect/>
-          </a:stretch>
-        </p:blipFill>
-        <p:spPr>
-          <a:xfrm>
-            <a:off x="8350150" y="2009775"/>
-            <a:ext cx="381000" cy="304800"/>
-          </a:xfrm>
-          <a:prstGeom prst="rect">
-            <a:avLst/>
-          </a:prstGeom>
-        </p:spPr>
-      </p:pic>
-      <p:sp>
-        <p:nvSpPr>
-          <p:cNvPr id="8" name="TextBox 7"/>
-          <p:cNvSpPr txBox="1"/>
-          <p:nvPr/>
-        </p:nvSpPr>
-        <p:spPr>
-          <a:xfrm>
-            <a:off x="762000" y="762000"/>
-            <a:ext cx="11430000" cy="466725"/>
-          </a:xfrm>
-          <a:prstGeom prst="rect">
-            <a:avLst/>
-          </a:prstGeom>
-          <a:noFill/>
-        </p:spPr>
-        <p:txBody>
-          <a:bodyPr wrap="none" lIns="0" rIns="0" tIns="0" bIns="0" anchor="t">
-            <a:spAutoFit/>
-          </a:bodyPr>
-          <a:lstStyle/>
-          <a:p>
-            <a:pPr algn="l"/>
-            <a:r>
-              <a:rPr b="1" sz="3000" i="0" u="none">
-                <a:solidFill>
-                  <a:srgbClr val="0F172A"/>
-                </a:solidFill>
-                <a:latin typeface="Inter"/>
-              </a:rPr>
-              <a:t>Plano de Ação</a:t>
-            </a:r>
-          </a:p>
-        </p:txBody>
-      </p:sp>
-      <p:sp>
-        <p:nvSpPr>
-          <p:cNvPr id="9" name="TextBox 8"/>
-          <p:cNvSpPr txBox="1"/>
-          <p:nvPr/>
-        </p:nvSpPr>
-        <p:spPr>
-          <a:xfrm>
-            <a:off x="1085850" y="2505075"/>
-            <a:ext cx="3617053" cy="228600"/>
-          </a:xfrm>
-          <a:prstGeom prst="rect">
-            <a:avLst/>
-          </a:prstGeom>
-          <a:noFill/>
-        </p:spPr>
-        <p:txBody>
-          <a:bodyPr wrap="none" lIns="0" rIns="0" tIns="0" bIns="0" anchor="t">
-            <a:spAutoFit/>
-          </a:bodyPr>
-          <a:lstStyle/>
-          <a:p>
-            <a:pPr algn="l"/>
-            <a:r>
-              <a:rPr b="1" sz="1500" i="0" u="none">
-                <a:solidFill>
-                  <a:srgbClr val="0F172A"/>
-                </a:solidFill>
-                <a:latin typeface="Inter"/>
-              </a:rPr>
-              <a:t>SLA Logístico Inflexível</a:t>
-            </a:r>
-          </a:p>
-        </p:txBody>
-      </p:sp>
-      <p:sp>
-        <p:nvSpPr>
-          <p:cNvPr id="10" name="TextBox 9"/>
-          <p:cNvSpPr txBox="1"/>
-          <p:nvPr/>
-        </p:nvSpPr>
-        <p:spPr>
-          <a:xfrm>
-            <a:off x="1085850" y="2847975"/>
-            <a:ext cx="2851100" cy="571500"/>
-          </a:xfrm>
-          <a:prstGeom prst="rect">
-            <a:avLst/>
-          </a:prstGeom>
-          <a:noFill/>
-        </p:spPr>
-        <p:txBody>
-          <a:bodyPr wrap="square" lIns="0" rIns="0" tIns="0" bIns="0" anchor="t">
-            <a:spAutoFit/>
-          </a:bodyPr>
-          <a:lstStyle/>
-          <a:p>
-            <a:pPr algn="l"/>
-            <a:r>
-              <a:rPr b="0" sz="1200" i="0" u="none">
-                <a:solidFill>
-                  <a:srgbClr val="475569"/>
-                </a:solidFill>
-                <a:latin typeface="Inter"/>
-              </a:rPr>
-              <a:t>Tolerância zero para atrasos. Revisão imediata de contratos com transportadoras ofensoras.</a:t>
-            </a:r>
-          </a:p>
-        </p:txBody>
-      </p:sp>
-      <p:sp>
-        <p:nvSpPr>
-          <p:cNvPr id="11" name="TextBox 10"/>
-          <p:cNvSpPr txBox="1"/>
-          <p:nvPr/>
-        </p:nvSpPr>
-        <p:spPr>
-          <a:xfrm>
-            <a:off x="4718000" y="2505075"/>
-            <a:ext cx="3617053" cy="228600"/>
-          </a:xfrm>
-          <a:prstGeom prst="rect">
-            <a:avLst/>
-          </a:prstGeom>
-          <a:noFill/>
-        </p:spPr>
-        <p:txBody>
-          <a:bodyPr wrap="none" lIns="0" rIns="0" tIns="0" bIns="0" anchor="t">
-            <a:spAutoFit/>
-          </a:bodyPr>
-          <a:lstStyle/>
-          <a:p>
-            <a:pPr algn="l"/>
-            <a:r>
-              <a:rPr b="1" sz="1500" i="0" u="none">
-                <a:solidFill>
-                  <a:srgbClr val="0F172A"/>
-                </a:solidFill>
-                <a:latin typeface="Inter"/>
-              </a:rPr>
-              <a:t>Autonomia no SAC (FCR)</a:t>
-            </a:r>
-          </a:p>
-        </p:txBody>
-      </p:sp>
-      <p:sp>
-        <p:nvSpPr>
-          <p:cNvPr id="12" name="TextBox 11"/>
-          <p:cNvSpPr txBox="1"/>
-          <p:nvPr/>
-        </p:nvSpPr>
-        <p:spPr>
-          <a:xfrm>
-            <a:off x="4718000" y="2847975"/>
-            <a:ext cx="2851100" cy="571500"/>
-          </a:xfrm>
-          <a:prstGeom prst="rect">
-            <a:avLst/>
-          </a:prstGeom>
-          <a:noFill/>
-        </p:spPr>
-        <p:txBody>
-          <a:bodyPr wrap="square" lIns="0" rIns="0" tIns="0" bIns="0" anchor="t">
-            <a:spAutoFit/>
-          </a:bodyPr>
-          <a:lstStyle/>
-          <a:p>
-            <a:pPr algn="l"/>
-            <a:r>
-              <a:rPr b="0" sz="1200" i="0" u="none">
-                <a:solidFill>
-                  <a:srgbClr val="475569"/>
-                </a:solidFill>
-                <a:latin typeface="Inter"/>
-              </a:rPr>
-              <a:t>Capacitar agentes para resolver o problema no primeiro contato, evitando a 2ª reclamação.</a:t>
-            </a:r>
-          </a:p>
-        </p:txBody>
-      </p:sp>
-      <p:sp>
-        <p:nvSpPr>
-          <p:cNvPr id="13" name="TextBox 12"/>
-          <p:cNvSpPr txBox="1"/>
-          <p:nvPr/>
-        </p:nvSpPr>
-        <p:spPr>
-          <a:xfrm>
-            <a:off x="8350150" y="2505075"/>
-            <a:ext cx="3617053" cy="228600"/>
-          </a:xfrm>
-          <a:prstGeom prst="rect">
-            <a:avLst/>
-          </a:prstGeom>
-          <a:noFill/>
-        </p:spPr>
-        <p:txBody>
-          <a:bodyPr wrap="none" lIns="0" rIns="0" tIns="0" bIns="0" anchor="t">
-            <a:spAutoFit/>
-          </a:bodyPr>
-          <a:lstStyle/>
-          <a:p>
-            <a:pPr algn="l"/>
-            <a:r>
-              <a:rPr b="1" sz="1500" i="0" u="none">
-                <a:solidFill>
-                  <a:srgbClr val="0F172A"/>
-                </a:solidFill>
-                <a:latin typeface="Inter"/>
-              </a:rPr>
-              <a:t>Deploy do Modelo Preditivo</a:t>
-            </a:r>
-          </a:p>
-        </p:txBody>
-      </p:sp>
-      <p:sp>
-        <p:nvSpPr>
-          <p:cNvPr id="14" name="TextBox 13"/>
-          <p:cNvSpPr txBox="1"/>
-          <p:nvPr/>
-        </p:nvSpPr>
-        <p:spPr>
-          <a:xfrm>
-            <a:off x="8350150" y="2847975"/>
-            <a:ext cx="2851100" cy="571500"/>
-          </a:xfrm>
-          <a:prstGeom prst="rect">
-            <a:avLst/>
-          </a:prstGeom>
-          <a:noFill/>
-        </p:spPr>
-        <p:txBody>
-          <a:bodyPr wrap="square" lIns="0" rIns="0" tIns="0" bIns="0" anchor="t">
-            <a:spAutoFit/>
-          </a:bodyPr>
-          <a:lstStyle/>
-          <a:p>
-            <a:pPr algn="l"/>
-            <a:r>
-              <a:rPr b="0" sz="1200" i="0" u="none">
-                <a:solidFill>
-                  <a:srgbClr val="475569"/>
-                </a:solidFill>
-                <a:latin typeface="Inter"/>
-              </a:rPr>
-              <a:t>Implementar Random Forest para gerar alertas de detração em tempo real na esteira.</a:t>
-            </a:r>
-          </a:p>
-        </p:txBody>
-      </p:sp>
-    </p:spTree>
-  </p:cSld>
-  <p:clrMapOvr>
-    <a:masterClrMapping/>
-  </p:clrMapOvr>
-</p:sld>
+<ns0:sld xmlns:ns0="http://schemas.openxmlformats.org/presentationml/2006/main" xmlns:ns1="http://schemas.openxmlformats.org/drawingml/2006/main" xmlns:ns2="http://schemas.openxmlformats.org/officeDocument/2006/relationships">
+  <ns0:cSld>
+    <ns0:bg>
+      <ns0:bgPr>
+        <ns1:solidFill>
+          <ns1:srgbClr val="FFFFFF"/>
+        </ns1:solidFill>
+        <ns1:effectLst/>
+      </ns0:bgPr>
+    </ns0:bg>
+    <ns0:spTree>
+      <ns0:nvGrpSpPr>
+        <ns0:cNvPr id="1" name=""/>
+        <ns0:cNvGrpSpPr/>
+        <ns0:nvPr/>
+      </ns0:nvGrpSpPr>
+      <ns0:grpSpPr/>
+      <ns0:sp>
+        <ns0:nvSpPr>
+          <ns0:cNvPr id="2" name="Rounded Rectangle 1"/>
+          <ns0:cNvSpPr/>
+          <ns0:nvPr/>
+        </ns0:nvSpPr>
+        <ns0:spPr>
+          <ns1:xfrm>
+            <ns1:off x="762000" y="1685925"/>
+            <ns1:ext cx="3403550" cy="4410075"/>
+          </ns1:xfrm>
+          <ns1:prstGeom prst="roundRect">
+            <ns1:avLst>
+              <ns1:gd name="adj" fmla="val 3358"/>
+            </ns1:avLst>
+          </ns1:prstGeom>
+          <ns1:noFill/>
+          <ns1:ln w="19050">
+            <ns1:solidFill>
+              <ns1:srgbClr val="E2E8F0"/>
+            </ns1:solidFill>
+          </ns1:ln>
+          <ns1:effectLst/>
+        </ns0:spPr>
+        <ns0:style>
+          <ns1:lnRef idx="1">
+            <ns1:schemeClr val="accent1"/>
+          </ns1:lnRef>
+          <ns1:fillRef idx="3">
+            <ns1:schemeClr val="accent1"/>
+          </ns1:fillRef>
+          <ns1:effectRef idx="2">
+            <ns1:schemeClr val="accent1"/>
+          </ns1:effectRef>
+          <ns1:fontRef idx="minor">
+            <ns1:schemeClr val="lt1"/>
+          </ns1:fontRef>
+        </ns0:style>
+        <ns0:txBody>
+          <ns1:bodyPr rtlCol="0" anchor="ctr"/>
+          <ns1:lstStyle/>
+          <ns1:p>
+            <ns1:pPr algn="ctr"/>
+          </ns1:p>
+        </ns0:txBody>
+      </ns0:sp>
+      <ns0:sp>
+        <ns0:nvSpPr>
+          <ns0:cNvPr id="3" name="Rounded Rectangle 2"/>
+          <ns0:cNvSpPr/>
+          <ns0:nvPr/>
+        </ns0:nvSpPr>
+        <ns0:spPr>
+          <ns1:xfrm>
+            <ns1:off x="4394150" y="1685925"/>
+            <ns1:ext cx="3403550" cy="4410075"/>
+          </ns1:xfrm>
+          <ns1:prstGeom prst="roundRect">
+            <ns1:avLst>
+              <ns1:gd name="adj" fmla="val 3358"/>
+            </ns1:avLst>
+          </ns1:prstGeom>
+          <ns1:noFill/>
+          <ns1:ln w="19050">
+            <ns1:solidFill>
+              <ns1:srgbClr val="E2E8F0"/>
+            </ns1:solidFill>
+          </ns1:ln>
+          <ns1:effectLst/>
+        </ns0:spPr>
+        <ns0:style>
+          <ns1:lnRef idx="1">
+            <ns1:schemeClr val="accent1"/>
+          </ns1:lnRef>
+          <ns1:fillRef idx="3">
+            <ns1:schemeClr val="accent1"/>
+          </ns1:fillRef>
+          <ns1:effectRef idx="2">
+            <ns1:schemeClr val="accent1"/>
+          </ns1:effectRef>
+          <ns1:fontRef idx="minor">
+            <ns1:schemeClr val="lt1"/>
+          </ns1:fontRef>
+        </ns0:style>
+        <ns0:txBody>
+          <ns1:bodyPr rtlCol="0" anchor="ctr"/>
+          <ns1:lstStyle/>
+          <ns1:p>
+            <ns1:pPr algn="ctr"/>
+          </ns1:p>
+        </ns0:txBody>
+      </ns0:sp>
+      <ns0:sp>
+        <ns0:nvSpPr>
+          <ns0:cNvPr id="4" name="Rounded Rectangle 3"/>
+          <ns0:cNvSpPr/>
+          <ns0:nvPr/>
+        </ns0:nvSpPr>
+        <ns0:spPr>
+          <ns1:xfrm>
+            <ns1:off x="8026300" y="1685925"/>
+            <ns1:ext cx="3403550" cy="4410075"/>
+          </ns1:xfrm>
+          <ns1:prstGeom prst="roundRect">
+            <ns1:avLst>
+              <ns1:gd name="adj" fmla="val 3358"/>
+            </ns1:avLst>
+          </ns1:prstGeom>
+          <ns1:noFill/>
+          <ns1:ln w="19050">
+            <ns1:solidFill>
+              <ns1:srgbClr val="E2E8F0"/>
+            </ns1:solidFill>
+          </ns1:ln>
+          <ns1:effectLst/>
+        </ns0:spPr>
+        <ns0:style>
+          <ns1:lnRef idx="1">
+            <ns1:schemeClr val="accent1"/>
+          </ns1:lnRef>
+          <ns1:fillRef idx="3">
+            <ns1:schemeClr val="accent1"/>
+          </ns1:fillRef>
+          <ns1:effectRef idx="2">
+            <ns1:schemeClr val="accent1"/>
+          </ns1:effectRef>
+          <ns1:fontRef idx="minor">
+            <ns1:schemeClr val="lt1"/>
+          </ns1:fontRef>
+        </ns0:style>
+        <ns0:txBody>
+          <ns1:bodyPr rtlCol="0" anchor="ctr"/>
+          <ns1:lstStyle/>
+          <ns1:p>
+            <ns1:pPr algn="ctr"/>
+          </ns1:p>
+        </ns0:txBody>
+      </ns0:sp>
+      <ns0:pic>
+        <ns0:nvPicPr>
+          <ns0:cNvPr id="5" name="Picture 4" descr="image.png"/>
+          <ns0:cNvPicPr>
+            <ns1:picLocks noChangeAspect="1"/>
+          </ns0:cNvPicPr>
+          <ns0:nvPr/>
+        </ns0:nvPicPr>
+        <ns0:blipFill>
+          <ns1:blip ns2:embed="rId2"/>
+          <ns1:stretch>
+            <ns1:fillRect/>
+          </ns1:stretch>
+        </ns0:blipFill>
+        <ns0:spPr>
+          <ns1:xfrm>
+            <ns1:off x="1085850" y="2009775"/>
+            <ns1:ext cx="304800" cy="304800"/>
+          </ns1:xfrm>
+          <ns1:prstGeom prst="rect">
+            <ns1:avLst/>
+          </ns1:prstGeom>
+        </ns0:spPr>
+      </ns0:pic>
+      <ns0:pic>
+        <ns0:nvPicPr>
+          <ns0:cNvPr id="6" name="Picture 5" descr="image.png"/>
+          <ns0:cNvPicPr>
+            <ns1:picLocks noChangeAspect="1"/>
+          </ns0:cNvPicPr>
+          <ns0:nvPr/>
+        </ns0:nvPicPr>
+        <ns0:blipFill>
+          <ns1:blip ns2:embed="rId3"/>
+          <ns1:stretch>
+            <ns1:fillRect/>
+          </ns1:stretch>
+        </ns0:blipFill>
+        <ns0:spPr>
+          <ns1:xfrm>
+            <ns1:off x="4718000" y="2009775"/>
+            <ns1:ext cx="266700" cy="304800"/>
+          </ns1:xfrm>
+          <ns1:prstGeom prst="rect">
+            <ns1:avLst/>
+          </ns1:prstGeom>
+        </ns0:spPr>
+      </ns0:pic>
+      <ns0:pic>
+        <ns0:nvPicPr>
+          <ns0:cNvPr id="7" name="Picture 6" descr="image.png"/>
+          <ns0:cNvPicPr>
+            <ns1:picLocks noChangeAspect="1"/>
+          </ns0:cNvPicPr>
+          <ns0:nvPr/>
+        </ns0:nvPicPr>
+        <ns0:blipFill>
+          <ns1:blip ns2:embed="rId4"/>
+          <ns1:stretch>
+            <ns1:fillRect/>
+          </ns1:stretch>
+        </ns0:blipFill>
+        <ns0:spPr>
+          <ns1:xfrm>
+            <ns1:off x="8350150" y="2009775"/>
+            <ns1:ext cx="381000" cy="304800"/>
+          </ns1:xfrm>
+          <ns1:prstGeom prst="rect">
+            <ns1:avLst/>
+          </ns1:prstGeom>
+        </ns0:spPr>
+      </ns0:pic>
+      <ns0:sp>
+        <ns0:nvSpPr>
+          <ns0:cNvPr id="8" name="TextBox 7"/>
+          <ns0:cNvSpPr txBox="1"/>
+          <ns0:nvPr/>
+        </ns0:nvSpPr>
+        <ns0:spPr>
+          <ns1:xfrm>
+            <ns1:off x="762000" y="762000"/>
+            <ns1:ext cx="11430000" cy="466725"/>
+          </ns1:xfrm>
+          <ns1:prstGeom prst="rect">
+            <ns1:avLst/>
+          </ns1:prstGeom>
+          <ns1:noFill/>
+        </ns0:spPr>
+        <ns0:txBody>
+          <ns1:bodyPr wrap="none" lIns="0" rIns="0" tIns="0" bIns="0" anchor="t">
+            <ns1:spAutoFit/>
+          </ns1:bodyPr>
+          <ns1:lstStyle/>
+          <ns1:p>
+            <ns1:pPr algn="l"/>
+            <ns1:r>
+              <ns1:rPr b="1" sz="3000" i="0" u="none">
+                <ns1:solidFill>
+                  <ns1:srgbClr val="0F172A"/>
+                </ns1:solidFill>
+                <ns1:latin typeface="Inter"/>
+              </ns1:rPr>
+              <ns1:t>Plano de Ação</ns1:t>
+            </ns1:r>
+          </ns1:p>
+        </ns0:txBody>
+      </ns0:sp>
+      <ns0:sp>
+        <ns0:nvSpPr>
+          <ns0:cNvPr id="9" name="TextBox 8"/>
+          <ns0:cNvSpPr txBox="1"/>
+          <ns0:nvPr/>
+        </ns0:nvSpPr>
+        <ns0:spPr>
+          <ns1:xfrm>
+            <ns1:off x="1085850" y="2505075"/>
+            <ns1:ext cx="3617053" cy="228600"/>
+          </ns1:xfrm>
+          <ns1:prstGeom prst="rect">
+            <ns1:avLst/>
+          </ns1:prstGeom>
+          <ns1:noFill/>
+        </ns0:spPr>
+        <ns0:txBody>
+          <ns1:bodyPr wrap="none" lIns="0" rIns="0" tIns="0" bIns="0" anchor="t">
+            <ns1:spAutoFit/>
+          </ns1:bodyPr>
+          <ns1:lstStyle/>
+          <ns1:p>
+            <ns1:pPr algn="l"/>
+            <ns1:r>
+              <ns1:rPr b="1" sz="1500" i="0" u="none">
+                <ns1:solidFill>
+                  <ns1:srgbClr val="0F172A"/>
+                </ns1:solidFill>
+                <ns1:latin typeface="Inter"/>
+              </ns1:rPr>
+              <ns1:t>Gestão do SLA logístico</ns1:t>
+            </ns1:r>
+          </ns1:p>
+        </ns0:txBody>
+      </ns0:sp>
+      <ns0:sp>
+        <ns0:nvSpPr>
+          <ns0:cNvPr id="10" name="TextBox 9"/>
+          <ns0:cNvSpPr txBox="1"/>
+          <ns0:nvPr/>
+        </ns0:nvSpPr>
+        <ns0:spPr>
+          <ns1:xfrm>
+            <ns1:off x="1085850" y="2847975"/>
+            <ns1:ext cx="2851100" cy="571500"/>
+          </ns1:xfrm>
+          <ns1:prstGeom prst="rect">
+            <ns1:avLst/>
+          </ns1:prstGeom>
+          <ns1:noFill/>
+        </ns0:spPr>
+        <ns0:txBody>
+          <ns1:bodyPr wrap="square" lIns="0" rIns="0" tIns="0" bIns="0" anchor="t">
+            <ns1:spAutoFit/>
+          </ns1:bodyPr>
+          <ns1:lstStyle/>
+          <ns1:p>
+            <ns1:pPr algn="l"/>
+            <ns1:r>
+              <ns1:rPr b="0" sz="1200" i="0" u="none">
+                <ns1:solidFill>
+                  <ns1:srgbClr val="475569"/>
+                </ns1:solidFill>
+                <ns1:latin typeface="Inter"/>
+              </ns1:rPr>
+              <ns1:t>Monitorar atrasos e validar ações com dados, contratos e capacidade operacional.</ns1:t>
+            </ns1:r>
+          </ns1:p>
+        </ns0:txBody>
+      </ns0:sp>
+      <ns0:sp>
+        <ns0:nvSpPr>
+          <ns0:cNvPr id="11" name="TextBox 10"/>
+          <ns0:cNvSpPr txBox="1"/>
+          <ns0:nvPr/>
+        </ns0:nvSpPr>
+        <ns0:spPr>
+          <ns1:xfrm>
+            <ns1:off x="4718000" y="2505075"/>
+            <ns1:ext cx="3617053" cy="228600"/>
+          </ns1:xfrm>
+          <ns1:prstGeom prst="rect">
+            <ns1:avLst/>
+          </ns1:prstGeom>
+          <ns1:noFill/>
+        </ns0:spPr>
+        <ns0:txBody>
+          <ns1:bodyPr wrap="none" lIns="0" rIns="0" tIns="0" bIns="0" anchor="t">
+            <ns1:spAutoFit/>
+          </ns1:bodyPr>
+          <ns1:lstStyle/>
+          <ns1:p>
+            <ns1:pPr algn="l"/>
+            <ns1:r>
+              <ns1:rPr b="1" sz="1500" i="0" u="none">
+                <ns1:solidFill>
+                  <ns1:srgbClr val="0F172A"/>
+                </ns1:solidFill>
+                <ns1:latin typeface="Inter"/>
+              </ns1:rPr>
+              <ns1:t>Autonomia no SAC (FCR)</ns1:t>
+            </ns1:r>
+          </ns1:p>
+        </ns0:txBody>
+      </ns0:sp>
+      <ns0:sp>
+        <ns0:nvSpPr>
+          <ns0:cNvPr id="12" name="TextBox 11"/>
+          <ns0:cNvSpPr txBox="1"/>
+          <ns0:nvPr/>
+        </ns0:nvSpPr>
+        <ns0:spPr>
+          <ns1:xfrm>
+            <ns1:off x="4718000" y="2847975"/>
+            <ns1:ext cx="2851100" cy="571500"/>
+          </ns1:xfrm>
+          <ns1:prstGeom prst="rect">
+            <ns1:avLst/>
+          </ns1:prstGeom>
+          <ns1:noFill/>
+        </ns0:spPr>
+        <ns0:txBody>
+          <ns1:bodyPr wrap="square" lIns="0" rIns="0" tIns="0" bIns="0" anchor="t">
+            <ns1:spAutoFit/>
+          </ns1:bodyPr>
+          <ns1:lstStyle/>
+          <ns1:p>
+            <ns1:pPr algn="l"/>
+            <ns1:r>
+              <ns1:rPr b="0" sz="1200" i="0" u="none">
+                <ns1:solidFill>
+                  <ns1:srgbClr val="475569"/>
+                </ns1:solidFill>
+                <ns1:latin typeface="Inter"/>
+              </ns1:rPr>
+              <ns1:t>Acompanhar reincidência e qualidade da resolução no primeiro contato.</ns1:t>
+            </ns1:r>
+          </ns1:p>
+        </ns0:txBody>
+      </ns0:sp>
+      <ns0:sp>
+        <ns0:nvSpPr>
+          <ns0:cNvPr id="13" name="TextBox 12"/>
+          <ns0:cNvSpPr txBox="1"/>
+          <ns0:nvPr/>
+        </ns0:nvSpPr>
+        <ns0:spPr>
+          <ns1:xfrm>
+            <ns1:off x="8350150" y="2505075"/>
+            <ns1:ext cx="3617053" cy="228600"/>
+          </ns1:xfrm>
+          <ns1:prstGeom prst="rect">
+            <ns1:avLst/>
+          </ns1:prstGeom>
+          <ns1:noFill/>
+        </ns0:spPr>
+        <ns0:txBody>
+          <ns1:bodyPr wrap="none" lIns="0" rIns="0" tIns="0" bIns="0" anchor="t">
+            <ns1:spAutoFit/>
+          </ns1:bodyPr>
+          <ns1:lstStyle/>
+          <ns1:p>
+            <ns1:pPr algn="l"/>
+            <ns1:r>
+              <ns1:rPr b="1" sz="1500" i="0" u="none">
+                <ns1:solidFill>
+                  <ns1:srgbClr val="0F172A"/>
+                </ns1:solidFill>
+                <ns1:latin typeface="Inter"/>
+              </ns1:rPr>
+              <ns1:t>Modelo preditivo (futuro)</ns1:t>
+            </ns1:r>
+          </ns1:p>
+        </ns0:txBody>
+      </ns0:sp>
+      <ns0:sp>
+        <ns0:nvSpPr>
+          <ns0:cNvPr id="14" name="TextBox 13"/>
+          <ns0:cNvSpPr txBox="1"/>
+          <ns0:nvPr/>
+        </ns0:nvSpPr>
+        <ns0:spPr>
+          <ns1:xfrm>
+            <ns1:off x="8350150" y="2847975"/>
+            <ns1:ext cx="2851100" cy="571500"/>
+          </ns1:xfrm>
+          <ns1:prstGeom prst="rect">
+            <ns1:avLst/>
+          </ns1:prstGeom>
+          <ns1:noFill/>
+        </ns0:spPr>
+        <ns0:txBody>
+          <ns1:bodyPr wrap="square" lIns="0" rIns="0" tIns="0" bIns="0" anchor="t">
+            <ns1:spAutoFit/>
+          </ns1:bodyPr>
+          <ns1:lstStyle/>
+          <ns1:p>
+            <ns1:pPr algn="l"/>
+            <ns1:r>
+              <ns1:rPr b="0" sz="1200" i="0" u="none">
+                <ns1:solidFill>
+                  <ns1:srgbClr val="475569"/>
+                </ns1:solidFill>
+                <ns1:latin typeface="Inter"/>
+              </ns1:rPr>
+              <ns1:t>Só avançar após validar dados, momento da previsão, baseline e benefício em piloto.</ns1:t>
+            </ns1:r>
+          </ns1:p>
+        </ns0:txBody>
+      </ns0:sp>
+    </ns0:spTree>
+  </ns0:cSld>
+  <ns0:clrMapOvr>
+    <ns1:masterClrMapping/>
+  </ns0:clrMapOvr>
+</ns0:sld>
 </file>
 
 <file path=ppt/theme/theme1.xml><?xml version="1.0" encoding="utf-8"?>
